--- a/docs/presentation/presentation.pptx
+++ b/docs/presentation/presentation.pptx
@@ -455,77 +455,43 @@
           <a:lstStyle xmlns:a="http://schemas.openxmlformats.org/drawingml/2006/main"/>
           <a:p xmlns:a="http://schemas.openxmlformats.org/drawingml/2006/main">
             <a:r>
-              <a:t>TIME 00:00–01:30</a:t>
+              <a:t>PRESENTER Nikhil</a:t>
             </a:r>
           </a:p>
+          <a:p xmlns:a="http://schemas.openxmlformats.org/drawingml/2006/main"/>
           <a:p xmlns:a="http://schemas.openxmlformats.org/drawingml/2006/main">
             <a:r>
-              <a:t>PRESENTER Nikhil</a:t>
+              <a:t>SCREEN: Slide 1. Both presenters on camera briefly, then the slide full screen. Do not show a fabricated patient or present this opening as a clinical case.</a:t>
             </a:r>
           </a:p>
+          <a:p xmlns:a="http://schemas.openxmlformats.org/drawingml/2006/main"/>
           <a:p xmlns:a="http://schemas.openxmlformats.org/drawingml/2006/main">
             <a:r>
-              <a:t>SCREEN: Slide 1. Both presenters on camera for the first 20 seconds, then slide full screen. Do not show a fabricated patient or pretend this opening is a clinical case.</a:t>
+              <a:t>Imagine a researcher looking at a glucose reading. The number is clear. The next two hours are much less clear. Is the trajectory rising? How uncertain is that prediction? And what information would make us stop trusting it?</a:t>
             </a:r>
           </a:p>
+          <a:p xmlns:a="http://schemas.openxmlformats.org/drawingml/2006/main"/>
           <a:p xmlns:a="http://schemas.openxmlformats.org/drawingml/2006/main">
             <a:r>
-              <a:t/>
+              <a:t>Those questions are the starting point for our T2D Glucose Digital Twin. In this presentation, we will follow synthetic subjects through a forecasting workflow. We will show the context that enters the model, the forecast that reaches the screen, and the evidence behind the result. We will also show where our evidence ends.</a:t>
             </a:r>
           </a:p>
+          <a:p xmlns:a="http://schemas.openxmlformats.org/drawingml/2006/main"/>
           <a:p xmlns:a="http://schemas.openxmlformats.org/drawingml/2006/main">
             <a:r>
-              <a:t>Imagine a researcher looking at a glucose reading. The number is clear. The next two hours are much less clear. Is the trajectory rising? How uncertain is that prediction? And what information would make us stop trusting it?</a:t>
+              <a:t>I am Nikhil VS, from East West Institute of Technology. My teammate is Akshaya R, from BGS College of Engineering and Technology. We use T2D Digital Twin Team as a descriptive name for our project.</a:t>
             </a:r>
           </a:p>
+          <a:p xmlns:a="http://schemas.openxmlformats.org/drawingml/2006/main"/>
           <a:p xmlns:a="http://schemas.openxmlformats.org/drawingml/2006/main">
             <a:r>
-              <a:t/>
+              <a:t>This is a research prototype using synthetic data. It has no live wearable connection, and we do not present it as a medical device or a treatment recommendation. The story you are about to see is a software demonstration, not a real patient's clinical history. Akshaya will begin with the problem we chose to investigate.</a:t>
             </a:r>
           </a:p>
+          <a:p xmlns:a="http://schemas.openxmlformats.org/drawingml/2006/main"/>
           <a:p xmlns:a="http://schemas.openxmlformats.org/drawingml/2006/main">
             <a:r>
-              <a:t>Those questions are the starting point for our T2D Glucose Digital Twin. Over the next twenty-one minutes, we will follow one synthetic subject through a forecasting workflow. We will show the context that enters the model, the forecast that reaches the screen, and the evidence behind the result. We will also show where our evidence ends.</a:t>
-            </a:r>
-          </a:p>
-          <a:p xmlns:a="http://schemas.openxmlformats.org/drawingml/2006/main">
-            <a:r>
-              <a:t/>
-            </a:r>
-          </a:p>
-          <a:p xmlns:a="http://schemas.openxmlformats.org/drawingml/2006/main">
-            <a:r>
-              <a:t>I am Nikhil VS, from East West Institute of Technology. My teammate is Akshaya R, from BGS College of Engineering and Technology. We use T2D Digital Twin Team as a descriptive name for our project.</a:t>
-            </a:r>
-          </a:p>
-          <a:p xmlns:a="http://schemas.openxmlformats.org/drawingml/2006/main">
-            <a:r>
-              <a:t/>
-            </a:r>
-          </a:p>
-          <a:p xmlns:a="http://schemas.openxmlformats.org/drawingml/2006/main">
-            <a:r>
-              <a:t>This is a research prototype using synthetic data. It has no live wearable connection, and we do not present it as a medical device or a treatment recommendation. The story you are about to see is a software demonstration, not a real patient's clinical history. Akshaya will begin with the problem we chose to investigate.</a:t>
-            </a:r>
-          </a:p>
-          <a:p xmlns:a="http://schemas.openxmlformats.org/drawingml/2006/main">
-            <a:r>
-              <a:t/>
-            </a:r>
-          </a:p>
-          <a:p xmlns:a="http://schemas.openxmlformats.org/drawingml/2006/main">
-            <a:r>
-              <a:t>SOURCE BASELINE: 1ab28f31fcc0954cf417bb10aafd4c785364e280</a:t>
-            </a:r>
-          </a:p>
-          <a:p xmlns:a="http://schemas.openxmlformats.org/drawingml/2006/main">
-            <a:r>
-              <a:t>https://github.com/AkshayAlgoX/T2D-Glucose-Digital-Twin./blob/1ab28f31fcc0954cf417bb10aafd4c785364e280/README.md</a:t>
-            </a:r>
-          </a:p>
-          <a:p xmlns:a="http://schemas.openxmlformats.org/drawingml/2006/main">
-            <a:r>
-              <a:t>Screenshots are supplied recorded evidence, not independently reproduced. EW-01 status comes from supplied project record.</a:t>
+              <a:t>SOURCES (repository paths at the submission commit): README.md</a:t>
             </a:r>
           </a:p>
         </p:txBody>
@@ -595,87 +561,49 @@
           <a:lstStyle xmlns:a="http://schemas.openxmlformats.org/drawingml/2006/main"/>
           <a:p xmlns:a="http://schemas.openxmlformats.org/drawingml/2006/main">
             <a:r>
-              <a:t>TIME 14:30–16:00</a:t>
+              <a:t>PRESENTER Akshaya</a:t>
             </a:r>
           </a:p>
+          <a:p xmlns:a="http://schemas.openxmlformats.org/drawingml/2006/main"/>
           <a:p xmlns:a="http://schemas.openxmlformats.org/drawingml/2006/main">
             <a:r>
-              <a:t>PRESENTER Akshaya</a:t>
+              <a:t>SCREEN: Slide 10. Recorded repository screenshot of an insufficient-history state for synthetic subject P0095 (training split). Do not break a service, inject data or force a fallback. Mention stale and disconnected as distinct states; do not claim reconnect continuity is proven.</a:t>
             </a:r>
           </a:p>
+          <a:p xmlns:a="http://schemas.openxmlformats.org/drawingml/2006/main"/>
           <a:p xmlns:a="http://schemas.openxmlformats.org/drawingml/2006/main">
             <a:r>
-              <a:t>SCREEN: Slide 10. Use the labelled repository insufficient-history screenshot. Do not deliberately break a service, inject data or force fallback during recording. Mention stale/disconnected as distinct states; do not claim reconnect continuity is proven.</a:t>
+              <a:t>A forecasting interface also needs to explain when it cannot provide an answer. Missing history, an unreachable service and an invalid response are different conditions. Showing a smooth curve in all of those cases would hide information the viewer needs.</a:t>
             </a:r>
           </a:p>
+          <a:p xmlns:a="http://schemas.openxmlformats.org/drawingml/2006/main"/>
           <a:p xmlns:a="http://schemas.openxmlformats.org/drawingml/2006/main">
             <a:r>
-              <a:t/>
+              <a:t>The current source has explicit handling for insufficient data, disconnected or stale transport, and responses that fail contract validation. The screenshot here records an insufficient-history state from the repository. It is not a fresh fault-injection test.</a:t>
             </a:r>
           </a:p>
+          <a:p xmlns:a="http://schemas.openxmlformats.org/drawingml/2006/main"/>
           <a:p xmlns:a="http://schemas.openxmlformats.org/drawingml/2006/main">
             <a:r>
-              <a:t>A forecasting interface also needs to explain when it cannot provide an answer. Missing history, an unreachable service and an invalid response are different conditions. Showing a smooth curve in all of those cases would hide information the viewer needs.</a:t>
+              <a:t>There are still engineering boundaries to be honest about. A reconnect mechanism does not by itself prove that every companion alert is delivered or that alert cooldown survives reconnection. A twin-only fallback path does not mean the browser continues inference when the network disappears. We are not claiming those properties have been fully verified in this release.</a:t>
             </a:r>
           </a:p>
+          <a:p xmlns:a="http://schemas.openxmlformats.org/drawingml/2006/main"/>
           <a:p xmlns:a="http://schemas.openxmlformats.org/drawingml/2006/main">
             <a:r>
-              <a:t/>
+              <a:t>Our practical rule is that a failure state should remain visible and should not be narrated as a successful prediction. We would rather show an unavailable answer than disguise an invalid one. That same approach applies to our scientific evidence: an attractive dashboard cannot turn incomplete validation into established performance.</a:t>
             </a:r>
           </a:p>
+          <a:p xmlns:a="http://schemas.openxmlformats.org/drawingml/2006/main"/>
           <a:p xmlns:a="http://schemas.openxmlformats.org/drawingml/2006/main">
             <a:r>
-              <a:t>The current source has explicit handling for insufficient data, disconnected or stale transport, and responses that fail contract validation. The screenshot here records an insufficient-history state from the repository. It is not a fresh fault-injection test, and we will not manufacture a failure during the live segment.</a:t>
+              <a:t>SOURCES (repository paths at the submission commit): src/components/digital-twin/PatientWorkspace.tsx; src/hooks/useRealtimeTelemetry.ts; docs/presentation/screens/slide10-answer-unavailable.png</a:t>
             </a:r>
           </a:p>
+          <a:p xmlns:a="http://schemas.openxmlformats.org/drawingml/2006/main"/>
           <a:p xmlns:a="http://schemas.openxmlformats.org/drawingml/2006/main">
             <a:r>
-              <a:t/>
-            </a:r>
-          </a:p>
-          <a:p xmlns:a="http://schemas.openxmlformats.org/drawingml/2006/main">
-            <a:r>
-              <a:t>There are still engineering boundaries to be honest about. A reconnect mechanism does not by itself prove that every companion alert is delivered or that alert cooldown survives reconnection. A twin-only fallback path does not mean the browser continues inference when the network disappears. We are not claiming those properties have been fully verified in this recording version.</a:t>
-            </a:r>
-          </a:p>
-          <a:p xmlns:a="http://schemas.openxmlformats.org/drawingml/2006/main">
-            <a:r>
-              <a:t/>
-            </a:r>
-          </a:p>
-          <a:p xmlns:a="http://schemas.openxmlformats.org/drawingml/2006/main">
-            <a:r>
-              <a:t>Our practical rule is that a failure state should remain visible and should not be narrated as a successful prediction. We would rather show an unavailable answer than disguise an invalid one. That same approach applies to our scientific evidence: an attractive dashboard cannot turn incomplete validation into established performance.</a:t>
-            </a:r>
-          </a:p>
-          <a:p xmlns:a="http://schemas.openxmlformats.org/drawingml/2006/main">
-            <a:r>
-              <a:t/>
-            </a:r>
-          </a:p>
-          <a:p xmlns:a="http://schemas.openxmlformats.org/drawingml/2006/main">
-            <a:r>
-              <a:t>SOURCE BASELINE: 1ab28f31fcc0954cf417bb10aafd4c785364e280</a:t>
-            </a:r>
-          </a:p>
-          <a:p xmlns:a="http://schemas.openxmlformats.org/drawingml/2006/main">
-            <a:r>
-              <a:t>https://github.com/AkshayAlgoX/T2D-Glucose-Digital-Twin./blob/1ab28f31fcc0954cf417bb10aafd4c785364e280/src/components/digital-twin/PatientWorkspace.tsx</a:t>
-            </a:r>
-          </a:p>
-          <a:p xmlns:a="http://schemas.openxmlformats.org/drawingml/2006/main">
-            <a:r>
-              <a:t>https://github.com/AkshayAlgoX/T2D-Glucose-Digital-Twin./blob/1ab28f31fcc0954cf417bb10aafd4c785364e280/src/hooks/useRealtimeTelemetry.ts</a:t>
-            </a:r>
-          </a:p>
-          <a:p xmlns:a="http://schemas.openxmlformats.org/drawingml/2006/main">
-            <a:r>
-              <a:t>https://github.com/AkshayAlgoX/T2D-Glucose-Digital-Twin./blob/1ab28f31fcc0954cf417bb10aafd4c785364e280/docs/screenshots/README.md</a:t>
-            </a:r>
-          </a:p>
-          <a:p xmlns:a="http://schemas.openxmlformats.org/drawingml/2006/main">
-            <a:r>
-              <a:t>Screenshots are supplied recorded evidence, not independently reproduced. EW-01 status comes from supplied project record.</a:t>
+              <a:t>Screenshots are recorded repository images of synthetic subjects; subject IDs were matched from the on-screen identifier (uuid5 in backend/serve_pr_tft.py) to runs/pr_tft_ablation_arm_d/split.json.</a:t>
             </a:r>
           </a:p>
         </p:txBody>
@@ -745,77 +673,43 @@
           <a:lstStyle xmlns:a="http://schemas.openxmlformats.org/drawingml/2006/main"/>
           <a:p xmlns:a="http://schemas.openxmlformats.org/drawingml/2006/main">
             <a:r>
-              <a:t>TIME 16:00–17:30</a:t>
+              <a:t>PRESENTER Nikhil</a:t>
             </a:r>
           </a:p>
+          <a:p xmlns:a="http://schemas.openxmlformats.org/drawingml/2006/main"/>
           <a:p xmlns:a="http://schemas.openxmlformats.org/drawingml/2006/main">
             <a:r>
-              <a:t>PRESENTER Nikhil</a:t>
+              <a:t>SCREEN: Slide 11. Keep the qualifiers visible: synthetic validation split, development evidence, and the in-sample box. Do not open held-out split files or run evaluation.</a:t>
             </a:r>
           </a:p>
+          <a:p xmlns:a="http://schemas.openxmlformats.org/drawingml/2006/main"/>
           <a:p xmlns:a="http://schemas.openxmlformats.org/drawingml/2006/main">
             <a:r>
-              <a:t>SCREEN: Slide 11. Keep the synthetic-validation qualifier visible. Point to each horizon and unit. Do not open held-out split files or run evaluation. These numbers come from validation fields in the existing manifest.</a:t>
+              <a:t>These results come from the synthetic validation split: 44 patients, which were also used for checkpoint selection and calibration. That makes them development evidence, not a held-out test. At sixty minutes the hybrid's root mean squared error is 19.53 milligrams per decilitre, against 23.23 for the physiological twin alone and 36.05 for persistence, on the same patients and anchors. Across horizons the hybrid records 12.36, 19.53 and 25.03 at thirty, sixty and one hundred and twenty minutes.</a:t>
             </a:r>
           </a:p>
+          <a:p xmlns:a="http://schemas.openxmlformats.org/drawingml/2006/main"/>
           <a:p xmlns:a="http://schemas.openxmlformats.org/drawingml/2006/main">
             <a:r>
-              <a:t/>
+              <a:t>For spike-onset risk, the raw model output has an AUROC of about 0.922. After isotonic calibration it is about 0.923, so calibration barely changes the ranking.</a:t>
             </a:r>
           </a:p>
+          <a:p xmlns:a="http://schemas.openxmlformats.org/drawingml/2006/main"/>
           <a:p xmlns:a="http://schemas.openxmlformats.org/drawingml/2006/main">
             <a:r>
-              <a:t>The run manifest contains recorded synthetic validation results. The root mean squared error is about 12.36 milligrams per decilitre at thirty minutes, 19.53 at sixty minutes and 25.03 at one hundred and twenty minutes. The longer-horizon values help show why a two-hour forecast should not be read as an exact future measurement.</a:t>
+              <a:t>The boxed figures are in-sample diagnostics. The conformal interval adjustment and the hazard calibration were fitted and scored on these same validation patients. Coverage of 80.00 percent is therefore expected by construction, with an interval width of 37.30 milligrams per decilitre, and the calibrated Brier score of 0.0703 is likewise in-sample. None of these numbers is independent performance evidence, and none establishes a clinical benefit.</a:t>
             </a:r>
           </a:p>
+          <a:p xmlns:a="http://schemas.openxmlformats.org/drawingml/2006/main"/>
           <a:p xmlns:a="http://schemas.openxmlformats.org/drawingml/2006/main">
             <a:r>
-              <a:t/>
+              <a:t>We have inspected these saved values; we have not re-run the experiment for this presentation. The next slide shows why the synthetic setting itself limits what they can mean.</a:t>
             </a:r>
           </a:p>
+          <a:p xmlns:a="http://schemas.openxmlformats.org/drawingml/2006/main"/>
           <a:p xmlns:a="http://schemas.openxmlformats.org/drawingml/2006/main">
             <a:r>
-              <a:t>The same record reports about eighty percent coverage for the conformal interval, with an average recorded interval-width metric of 37.30 milligrams per decilitre. We label that field as interval width rather than inventing a median-width claim.</a:t>
-            </a:r>
-          </a:p>
-          <a:p xmlns:a="http://schemas.openxmlformats.org/drawingml/2006/main">
-            <a:r>
-              <a:t/>
-            </a:r>
-          </a:p>
-          <a:p xmlns:a="http://schemas.openxmlformats.org/drawingml/2006/main">
-            <a:r>
-              <a:t>For spike-onset probability, the calibrated record reports an AUROC of approximately 0.923 and a Brier score of approximately 0.0703. These describe different aspects of prediction. Neither number is a percentage of patients treated successfully, and neither establishes a benefit in clinical practice.</a:t>
-            </a:r>
-          </a:p>
-          <a:p xmlns:a="http://schemas.openxmlformats.org/drawingml/2006/main">
-            <a:r>
-              <a:t/>
-            </a:r>
-          </a:p>
-          <a:p xmlns:a="http://schemas.openxmlformats.org/drawingml/2006/main">
-            <a:r>
-              <a:t>We have inspected these saved values. We have not independently reproduced the experiment for this video preparation. The observations are synthetic and the validation record is separate from held-out evaluation. The next slide shows the most important reason we must keep that distinction explicit.</a:t>
-            </a:r>
-          </a:p>
-          <a:p xmlns:a="http://schemas.openxmlformats.org/drawingml/2006/main">
-            <a:r>
-              <a:t/>
-            </a:r>
-          </a:p>
-          <a:p xmlns:a="http://schemas.openxmlformats.org/drawingml/2006/main">
-            <a:r>
-              <a:t>SOURCE BASELINE: 1ab28f31fcc0954cf417bb10aafd4c785364e280</a:t>
-            </a:r>
-          </a:p>
-          <a:p xmlns:a="http://schemas.openxmlformats.org/drawingml/2006/main">
-            <a:r>
-              <a:t>https://github.com/AkshayAlgoX/T2D-Glucose-Digital-Twin./blob/1ab28f31fcc0954cf417bb10aafd4c785364e280/runs/pr_tft_ablation_arm_d/run_manifest.json</a:t>
-            </a:r>
-          </a:p>
-          <a:p xmlns:a="http://schemas.openxmlformats.org/drawingml/2006/main">
-            <a:r>
-              <a:t>Screenshots are supplied recorded evidence, not independently reproduced. EW-01 status comes from supplied project record.</a:t>
+              <a:t>SOURCES (repository paths at the submission commit): runs/pr_tft_ablation_arm_d/evaluation_report.json (populations.primary.models; calibration_resubstitution_diagnostics, status RESUBSTITUTION_DIAGNOSTIC); runs/pr_tft_ablation_arm_d/run_manifest.json (validation.hazard_raw.auroc 0.922061; validation.hazard_calibrated.auroc 0.922616); docs/submission/CLAIM_EVIDENCE_LEDGER.md (C11)</a:t>
             </a:r>
           </a:p>
         </p:txBody>
@@ -885,92 +779,49 @@
           <a:lstStyle xmlns:a="http://schemas.openxmlformats.org/drawingml/2006/main"/>
           <a:p xmlns:a="http://schemas.openxmlformats.org/drawingml/2006/main">
             <a:r>
-              <a:t>TIME 17:30–19:00</a:t>
+              <a:t>PRESENTER Akshaya</a:t>
             </a:r>
           </a:p>
+          <a:p xmlns:a="http://schemas.openxmlformats.org/drawingml/2006/main"/>
           <a:p xmlns:a="http://schemas.openxmlformats.org/drawingml/2006/main">
             <a:r>
-              <a:t>PRESENTER Akshaya</a:t>
+              <a:t>SCREEN: Slide 12. Hold the FAIL text clearly. The comparator is mock-real, not clinical data. EW-01 is recorded as unexecuted in the claim-evidence ledger (C14); do not claim a new evaluation. Use no clinical efficacy graphic.</a:t>
             </a:r>
           </a:p>
+          <a:p xmlns:a="http://schemas.openxmlformats.org/drawingml/2006/main"/>
           <a:p xmlns:a="http://schemas.openxmlformats.org/drawingml/2006/main">
             <a:r>
-              <a:t>SCREEN: Slide 12. Hold the FAIL text clearly. The comparator is mock-real, not clinical data. EW-01 status is carried forward from the supplied project record; do not claim a new evaluation. Use no clinical efficacy graphic.</a:t>
+              <a:t>The synthetic-data validation report records a failure of Gate 3. This check compared the generated data with an independent mock-real comparator. It did not compare our system with a real clinical deployment.</a:t>
             </a:r>
           </a:p>
+          <a:p xmlns:a="http://schemas.openxmlformats.org/drawingml/2006/main"/>
           <a:p xmlns:a="http://schemas.openxmlformats.org/drawingml/2006/main">
             <a:r>
-              <a:t/>
+              <a:t>The discriminator separated the two sources much more readily than the criterion allowed. The recorded AUROC was about 0.932, against an acceptance target of at most 0.65. That is a limitation of the data-realism evidence, not a result we can hide behind the forecast metrics on the previous slide.</a:t>
             </a:r>
           </a:p>
+          <a:p xmlns:a="http://schemas.openxmlformats.org/drawingml/2006/main"/>
           <a:p xmlns:a="http://schemas.openxmlformats.org/drawingml/2006/main">
             <a:r>
-              <a:t>The synthetic-data validation report records a failure of Gate 3. This check compared the generated data with an independent mock-real comparator. It did not compare our system with a real clinical deployment.</a:t>
+              <a:t>The project record also leaves the EW-01 study protocol unexecuted. We have not performed that evaluation in preparing this submission. There is no basis here to claim clinical efficacy, regulatory approval, or reliable transfer to patients outside the synthetic setting.</a:t>
             </a:r>
           </a:p>
+          <a:p xmlns:a="http://schemas.openxmlformats.org/drawingml/2006/main"/>
           <a:p xmlns:a="http://schemas.openxmlformats.org/drawingml/2006/main">
             <a:r>
-              <a:t/>
+              <a:t>These limitations shape the next research steps: understand the realism gap, independently reproduce the existing results, and complete the frozen AI-READI confirmation once data access is approved. The real-patient and external results on the final slide show how far the evidence currently goes.</a:t>
             </a:r>
           </a:p>
+          <a:p xmlns:a="http://schemas.openxmlformats.org/drawingml/2006/main"/>
           <a:p xmlns:a="http://schemas.openxmlformats.org/drawingml/2006/main">
             <a:r>
-              <a:t>The discriminator separated the two sources much more readily than the criterion allowed. The recorded AUROC was about 0.932. That is a limitation of the data-realism evidence, not a result we can hide behind the forecast metrics on the previous slide.</a:t>
+              <a:t>Returning to our opening question, the model can offer a forecast in this synthetic workflow. The evidence does not yet tell us that acting on it would improve a real person's outcome. That is the boundary we want a reviewer to see clearly.</a:t>
             </a:r>
           </a:p>
+          <a:p xmlns:a="http://schemas.openxmlformats.org/drawingml/2006/main"/>
           <a:p xmlns:a="http://schemas.openxmlformats.org/drawingml/2006/main">
             <a:r>
-              <a:t/>
-            </a:r>
-          </a:p>
-          <a:p xmlns:a="http://schemas.openxmlformats.org/drawingml/2006/main">
-            <a:r>
-              <a:t>The project record also leaves external EW-01 evaluation unexecuted. We have not performed that evaluation in preparing this submission. There is no basis here to claim clinical efficacy, regulatory approval, or reliable transfer to patients outside the synthetic setting.</a:t>
-            </a:r>
-          </a:p>
-          <a:p xmlns:a="http://schemas.openxmlformats.org/drawingml/2006/main">
-            <a:r>
-              <a:t/>
-            </a:r>
-          </a:p>
-          <a:p xmlns:a="http://schemas.openxmlformats.org/drawingml/2006/main">
-            <a:r>
-              <a:t>These limitations shape the next research steps. We need to understand the realism gap, independently reproduce the existing results, and pursue appropriately governed external validation before considering clinical use. We should not rush a new scientific experiment merely to fill a presentation slide before a deadline.</a:t>
-            </a:r>
-          </a:p>
-          <a:p xmlns:a="http://schemas.openxmlformats.org/drawingml/2006/main">
-            <a:r>
-              <a:t/>
-            </a:r>
-          </a:p>
-          <a:p xmlns:a="http://schemas.openxmlformats.org/drawingml/2006/main">
-            <a:r>
-              <a:t>Returning to our opening question, the model can offer a forecast in this synthetic workflow. The evidence does not yet tell us that acting on it would improve a real person's outcome. That is the boundary we want a reviewer to see clearly.</a:t>
-            </a:r>
-          </a:p>
-          <a:p xmlns:a="http://schemas.openxmlformats.org/drawingml/2006/main">
-            <a:r>
-              <a:t/>
-            </a:r>
-          </a:p>
-          <a:p xmlns:a="http://schemas.openxmlformats.org/drawingml/2006/main">
-            <a:r>
-              <a:t>SOURCE BASELINE: 1ab28f31fcc0954cf417bb10aafd4c785364e280</a:t>
-            </a:r>
-          </a:p>
-          <a:p xmlns:a="http://schemas.openxmlformats.org/drawingml/2006/main">
-            <a:r>
-              <a:t>https://github.com/AkshayAlgoX/T2D-Glucose-Digital-Twin./blob/1ab28f31fcc0954cf417bb10aafd4c785364e280/backend/synthetic_v2/validation/validation_report.json</a:t>
-            </a:r>
-          </a:p>
-          <a:p xmlns:a="http://schemas.openxmlformats.org/drawingml/2006/main">
-            <a:r>
-              <a:t>https://github.com/AkshayAlgoX/T2D-Glucose-Digital-Twin./blob/1ab28f31fcc0954cf417bb10aafd4c785364e280/Supplied project record: EW-01 unexecuted</a:t>
-            </a:r>
-          </a:p>
-          <a:p xmlns:a="http://schemas.openxmlformats.org/drawingml/2006/main">
-            <a:r>
-              <a:t>Screenshots are supplied recorded evidence, not independently reproduced. EW-01 status comes from supplied project record.</a:t>
+              <a:t>SOURCES (repository paths at the submission commit): backend/synthetic_v2/validation/validation_report.json (GATE 3, check G3.1); docs/submission/CLAIM_EVIDENCE_LEDGER.md (C14); docs/architecture/architecture.html</a:t>
             </a:r>
           </a:p>
         </p:txBody>
@@ -1040,97 +891,49 @@
           <a:lstStyle xmlns:a="http://schemas.openxmlformats.org/drawingml/2006/main"/>
           <a:p xmlns:a="http://schemas.openxmlformats.org/drawingml/2006/main">
             <a:r>
-              <a:t>TIME 19:00–20:30</a:t>
+              <a:t>PRESENTER Nikhil</a:t>
             </a:r>
           </a:p>
+          <a:p xmlns:a="http://schemas.openxmlformats.org/drawingml/2006/main"/>
           <a:p xmlns:a="http://schemas.openxmlformats.org/drawingml/2006/main">
             <a:r>
-              <a:t>PRESENTER Nikhil</a:t>
+              <a:t>SCREEN: Slide 13. The screenshot is the Evidence page recorded from an earlier build, before the run's validation report was committed; it shows 'Not yet evaluated' under held-out test evaluation. Point to source and manifest identity. No terminal commands, tokens or private browser tabs.</a:t>
             </a:r>
           </a:p>
+          <a:p xmlns:a="http://schemas.openxmlformats.org/drawingml/2006/main"/>
           <a:p xmlns:a="http://schemas.openxmlformats.org/drawingml/2006/main">
             <a:r>
-              <a:t>SCREEN: Slide 13 with recorded Evidence-page screenshot. Explain “Not yet evaluated” without implying the manifest contains no validation metrics. Point to source/manifest identity. No terminal commands, tokens or private browser tabs.</a:t>
+              <a:t>A reviewer should be able to connect the interface to the artifacts behind it. The repository contains the serving code, versioned contracts, model configuration and run manifest. The evidence view exposes provenance for the served run.</a:t>
             </a:r>
           </a:p>
+          <a:p xmlns:a="http://schemas.openxmlformats.org/drawingml/2006/main"/>
           <a:p xmlns:a="http://schemas.openxmlformats.org/drawingml/2006/main">
             <a:r>
-              <a:t/>
+              <a:t>It also distinguishes validation results from held-out evaluation. The recorded page says the held-out test is not yet evaluated, and that remains true: the synthetic test split is sealed and has not been run. The current release also shows the validation report from slide 11, which is a different artifact and a different claim.</a:t>
             </a:r>
           </a:p>
+          <a:p xmlns:a="http://schemas.openxmlformats.org/drawingml/2006/main"/>
           <a:p xmlns:a="http://schemas.openxmlformats.org/drawingml/2006/main">
             <a:r>
-              <a:t>A reviewer should be able to connect the interface to the artifacts behind it. The repository contains the serving code, versioned contracts, model configuration and run manifest. The evidence view exposes provenance for the served run.</a:t>
+              <a:t>The screenshot on this slide comes from an earlier build of the same application. The repository README records the setup, the test commands and the evidence scripts for this release.</a:t>
             </a:r>
           </a:p>
+          <a:p xmlns:a="http://schemas.openxmlformats.org/drawingml/2006/main"/>
           <a:p xmlns:a="http://schemas.openxmlformats.org/drawingml/2006/main">
             <a:r>
-              <a:t/>
+              <a:t>For an engineering reviewer, the remaining priority areas include fallback quantile ordering, reconnect alert continuity, missing-sample causality and null or insufficient-data responses. Those deserve focused verification. They do not justify changing scientific artifacts to make tests pass.</a:t>
             </a:r>
           </a:p>
+          <a:p xmlns:a="http://schemas.openxmlformats.org/drawingml/2006/main"/>
           <a:p xmlns:a="http://schemas.openxmlformats.org/drawingml/2006/main">
             <a:r>
-              <a:t>It also distinguishes a manifest from an evaluation report. The release does not contain the held-out evaluation report expected by that page, so the recorded page says not yet evaluated. That statement is compatible with having saved validation metrics in the training-run manifest. They are different artifacts and different claims.</a:t>
+              <a:t>Our submission makes its implementation inspectable and its limitations explicit. Akshaya will close by returning to the question that started the project.</a:t>
             </a:r>
           </a:p>
+          <a:p xmlns:a="http://schemas.openxmlformats.org/drawingml/2006/main"/>
           <a:p xmlns:a="http://schemas.openxmlformats.org/drawingml/2006/main">
             <a:r>
-              <a:t/>
-            </a:r>
-          </a:p>
-          <a:p xmlns:a="http://schemas.openxmlformats.org/drawingml/2006/main">
-            <a:r>
-              <a:t>The screenshot on this slide has its own recorded provenance. Our earlier connected smoke demonstration used an older commit. We do not transfer that result automatically to this release, and we do not describe a full backend suite as passing without a complete result on the exact version.</a:t>
-            </a:r>
-          </a:p>
-          <a:p xmlns:a="http://schemas.openxmlformats.org/drawingml/2006/main">
-            <a:r>
-              <a:t/>
-            </a:r>
-          </a:p>
-          <a:p xmlns:a="http://schemas.openxmlformats.org/drawingml/2006/main">
-            <a:r>
-              <a:t>For an engineering reviewer, the remaining priority areas include fallback quantile ordering, reconnect alert continuity, missing-sample causality and null or insufficient-data responses. Those deserve focused verification. They do not justify changing scientific artifacts to make tests pass.</a:t>
-            </a:r>
-          </a:p>
-          <a:p xmlns:a="http://schemas.openxmlformats.org/drawingml/2006/main">
-            <a:r>
-              <a:t/>
-            </a:r>
-          </a:p>
-          <a:p xmlns:a="http://schemas.openxmlformats.org/drawingml/2006/main">
-            <a:r>
-              <a:t>Our submission makes its implementation inspectable and its limitations explicit. Akshaya will close by returning to the question that started the project.</a:t>
-            </a:r>
-          </a:p>
-          <a:p xmlns:a="http://schemas.openxmlformats.org/drawingml/2006/main">
-            <a:r>
-              <a:t/>
-            </a:r>
-          </a:p>
-          <a:p xmlns:a="http://schemas.openxmlformats.org/drawingml/2006/main">
-            <a:r>
-              <a:t>SOURCE BASELINE: 1ab28f31fcc0954cf417bb10aafd4c785364e280</a:t>
-            </a:r>
-          </a:p>
-          <a:p xmlns:a="http://schemas.openxmlformats.org/drawingml/2006/main">
-            <a:r>
-              <a:t>https://github.com/AkshayAlgoX/T2D-Glucose-Digital-Twin./blob/1ab28f31fcc0954cf417bb10aafd4c785364e280/src/app/evidence/page.tsx</a:t>
-            </a:r>
-          </a:p>
-          <a:p xmlns:a="http://schemas.openxmlformats.org/drawingml/2006/main">
-            <a:r>
-              <a:t>https://github.com/AkshayAlgoX/T2D-Glucose-Digital-Twin./blob/1ab28f31fcc0954cf417bb10aafd4c785364e280/docs/screenshots/README.md</a:t>
-            </a:r>
-          </a:p>
-          <a:p xmlns:a="http://schemas.openxmlformats.org/drawingml/2006/main">
-            <a:r>
-              <a:t>https://github.com/AkshayAlgoX/T2D-Glucose-Digital-Twin./blob/1ab28f31fcc0954cf417bb10aafd4c785364e280/Supplied independent-defect review request</a:t>
-            </a:r>
-          </a:p>
-          <a:p xmlns:a="http://schemas.openxmlformats.org/drawingml/2006/main">
-            <a:r>
-              <a:t>Screenshots are supplied recorded evidence, not independently reproduced. EW-01 status comes from supplied project record.</a:t>
+              <a:t>SOURCES (repository paths at the submission commit): src/app/evidence/page.tsx; docs/presentation/screens/slide13-reviewer-inspection.png; README.md</a:t>
             </a:r>
           </a:p>
         </p:txBody>
@@ -1200,77 +1003,43 @@
           <a:lstStyle xmlns:a="http://schemas.openxmlformats.org/drawingml/2006/main"/>
           <a:p xmlns:a="http://schemas.openxmlformats.org/drawingml/2006/main">
             <a:r>
-              <a:t>TIME 20:30–21:30</a:t>
+              <a:t>PRESENTER Akshaya + Nikhil</a:t>
             </a:r>
           </a:p>
+          <a:p xmlns:a="http://schemas.openxmlformats.org/drawingml/2006/main"/>
           <a:p xmlns:a="http://schemas.openxmlformats.org/drawingml/2006/main">
             <a:r>
-              <a:t>PRESENTER Akshaya + Nikhil</a:t>
+              <a:t>SCREEN: Slide 14. Both presenters return on camera for the close. Read the four evidence lines as written.</a:t>
             </a:r>
           </a:p>
+          <a:p xmlns:a="http://schemas.openxmlformats.org/drawingml/2006/main"/>
           <a:p xmlns:a="http://schemas.openxmlformats.org/drawingml/2006/main">
             <a:r>
-              <a:t>SCREEN: Slide 14. Both presenters return on camera for the last 20 seconds. End at 21:30 or later if natural delivery needs it. Do not speed up to hit the target. Final export must remain at least 20:00.</a:t>
+              <a:t>AKSHAYA: We began with a glucose reading and a question about the next two hours. Our prototype gives that question an inspectable workflow: synthetic context enters a hybrid forecaster, and the interface presents a timestamped trajectory with uncertainty and risk.</a:t>
             </a:r>
           </a:p>
+          <a:p xmlns:a="http://schemas.openxmlformats.org/drawingml/2006/main"/>
           <a:p xmlns:a="http://schemas.openxmlformats.org/drawingml/2006/main">
             <a:r>
-              <a:t/>
+              <a:t>The evidence has clear limits. On the locked real-patient test, the model warned of only 6.9 percent of spikes at least thirty minutes ahead. That is the full-test point estimate, with a 95 percent interval from 0.0 to 13.9; the bootstrap mean is 6.0 percent. Two preregistered external checks, Hall 2018 and AZT1D, did not confirm the prespecified early-warning improvement. Candidate C2 is exploratory: plus 4.5 points, with an interval from minus 2.5 to plus 12.8 that includes zero. We have not established a treatment benefit.</a:t>
             </a:r>
           </a:p>
+          <a:p xmlns:a="http://schemas.openxmlformats.org/drawingml/2006/main"/>
           <a:p xmlns:a="http://schemas.openxmlformats.org/drawingml/2006/main">
             <a:r>
-              <a:t>AKSHAYA: We began with a glucose reading and a question about the next two hours. Our prototype gives that question an inspectable workflow: synthetic context enters a hybrid forecaster, and the interface presents a timestamped trajectory with uncertainty and risk.</a:t>
+              <a:t>NIKHIL: Our next step is the AI-READI confirmation. Its protocol is frozen, and it will run once, after data access is approved; it has not been run. We would welcome feedback on the forecasting interface, the model assumptions and the validation plan.</a:t>
             </a:r>
           </a:p>
+          <a:p xmlns:a="http://schemas.openxmlformats.org/drawingml/2006/main"/>
           <a:p xmlns:a="http://schemas.openxmlformats.org/drawingml/2006/main">
             <a:r>
-              <a:t/>
+              <a:t>AKSHAYA: Thank you for considering our T2D Glucose Digital Twin. We hope the demonstration makes both the possibilities and the boundaries clear.</a:t>
             </a:r>
           </a:p>
+          <a:p xmlns:a="http://schemas.openxmlformats.org/drawingml/2006/main"/>
           <a:p xmlns:a="http://schemas.openxmlformats.org/drawingml/2006/main">
             <a:r>
-              <a:t>The contribution is the working research workflow and the care taken to distinguish an estimate from evidence. The remaining work includes engineering verification, independent reproduction and external validation. We have not established a treatment benefit.</a:t>
-            </a:r>
-          </a:p>
-          <a:p xmlns:a="http://schemas.openxmlformats.org/drawingml/2006/main">
-            <a:r>
-              <a:t/>
-            </a:r>
-          </a:p>
-          <a:p xmlns:a="http://schemas.openxmlformats.org/drawingml/2006/main">
-            <a:r>
-              <a:t>NIKHIL: We would welcome feedback on the forecasting interface, the model assumptions and the validation plan. Our immediate next step is to make the current release reproducible and reviewable, then address the remaining defects before extending the research.</a:t>
-            </a:r>
-          </a:p>
-          <a:p xmlns:a="http://schemas.openxmlformats.org/drawingml/2006/main">
-            <a:r>
-              <a:t/>
-            </a:r>
-          </a:p>
-          <a:p xmlns:a="http://schemas.openxmlformats.org/drawingml/2006/main">
-            <a:r>
-              <a:t>AKSHAYA: Thank you for considering our T2D Glucose Digital Twin. We hope the demonstration makes both the possibilities and the boundaries clear.</a:t>
-            </a:r>
-          </a:p>
-          <a:p xmlns:a="http://schemas.openxmlformats.org/drawingml/2006/main">
-            <a:r>
-              <a:t/>
-            </a:r>
-          </a:p>
-          <a:p xmlns:a="http://schemas.openxmlformats.org/drawingml/2006/main">
-            <a:r>
-              <a:t>SOURCE BASELINE: 1ab28f31fcc0954cf417bb10aafd4c785364e280</a:t>
-            </a:r>
-          </a:p>
-          <a:p xmlns:a="http://schemas.openxmlformats.org/drawingml/2006/main">
-            <a:r>
-              <a:t>https://github.com/AkshayAlgoX/T2D-Glucose-Digital-Twin./blob/1ab28f31fcc0954cf417bb10aafd4c785364e280/README.md</a:t>
-            </a:r>
-          </a:p>
-          <a:p xmlns:a="http://schemas.openxmlformats.org/drawingml/2006/main">
-            <a:r>
-              <a:t>Screenshots are supplied recorded evidence, not independently reproduced. EW-01 status comes from supplied project record.</a:t>
+              <a:t>SOURCES (repository paths at the submission commit): docs/evidence/real_data/results.json (test_results.event_sensitivity_30m, event_sensitivity_30m_ci95); docs/evidence/real_data/RESULTS.md; docs/submission/LOCKED_RESULTS_RECONCILIATION.md; docs/evidence/external_hall/RESULTS.md; docs/evidence/external_v2/RESULTS.md; docs/evidence/fa_controller/README.md; docs/evidence/aireadi_confirmation/PREREGISTRATION.md</a:t>
             </a:r>
           </a:p>
         </p:txBody>
@@ -1340,82 +1109,43 @@
           <a:lstStyle xmlns:a="http://schemas.openxmlformats.org/drawingml/2006/main"/>
           <a:p xmlns:a="http://schemas.openxmlformats.org/drawingml/2006/main">
             <a:r>
-              <a:t>TIME 01:30–03:00</a:t>
+              <a:t>PRESENTER Akshaya</a:t>
             </a:r>
           </a:p>
+          <a:p xmlns:a="http://schemas.openxmlformats.org/drawingml/2006/main"/>
           <a:p xmlns:a="http://schemas.openxmlformats.org/drawingml/2006/main">
             <a:r>
-              <a:t>PRESENTER Akshaya</a:t>
+              <a:t>SCREEN: Slide 2. Point to the three questions one at a time. Leave the final question visible during the handoff.</a:t>
             </a:r>
           </a:p>
+          <a:p xmlns:a="http://schemas.openxmlformats.org/drawingml/2006/main"/>
           <a:p xmlns:a="http://schemas.openxmlformats.org/drawingml/2006/main">
             <a:r>
-              <a:t>SCREEN: Slide 2. Point to the three questions one at a time. Leave the final question visible during the handoff.</a:t>
+              <a:t>A glucose reading describes a moment. A forecast asks what may happen after that moment. The healthcare use case we chose is Type 2 Diabetes research, where interpreting a trajectory also requires understanding the information available about the person and the quality of their measurements.</a:t>
             </a:r>
           </a:p>
+          <a:p xmlns:a="http://schemas.openxmlformats.org/drawingml/2006/main"/>
           <a:p xmlns:a="http://schemas.openxmlformats.org/drawingml/2006/main">
             <a:r>
-              <a:t/>
+              <a:t>Our prototype asks whether a physiological prior and a learned forecasting model can present that future in a form a researcher can inspect. The intended interaction is straightforward: select a subject, examine the current reading, look at the predicted trajectory, then ask how much confidence the surrounding evidence supports.</a:t>
             </a:r>
           </a:p>
+          <a:p xmlns:a="http://schemas.openxmlformats.org/drawingml/2006/main"/>
           <a:p xmlns:a="http://schemas.openxmlformats.org/drawingml/2006/main">
             <a:r>
-              <a:t>A glucose reading describes a moment. A forecast asks what may happen after that moment. The healthcare use case we chose is Type 2 Diabetes research, where interpreting a trajectory also requires understanding the information available about the person and the quality of their measurements.</a:t>
+              <a:t>The interface should help someone distinguish a high predicted risk from a reliable input stream. Those are different questions. A low risk estimate does not prove that a person is safe. A fresh-looking screen does not prove that the model has recent data.</a:t>
             </a:r>
           </a:p>
+          <a:p xmlns:a="http://schemas.openxmlformats.org/drawingml/2006/main"/>
           <a:p xmlns:a="http://schemas.openxmlformats.org/drawingml/2006/main">
             <a:r>
-              <a:t/>
+              <a:t>So our design makes the timestamp, model mode and input quality visible beside the result. We are not claiming that this workflow improves clinical outcomes or gives a guaranteed amount of warning. We are presenting a concrete way to examine those questions before any clinical use. To understand the demonstration, we first need to understand who our subject actually is.</a:t>
             </a:r>
           </a:p>
+          <a:p xmlns:a="http://schemas.openxmlformats.org/drawingml/2006/main"/>
           <a:p xmlns:a="http://schemas.openxmlformats.org/drawingml/2006/main">
             <a:r>
-              <a:t>Our prototype asks whether a physiological prior and a learned forecasting model can present that future in a form a researcher can inspect. The intended interaction is straightforward: select a subject, examine the current reading, look at the predicted trajectory, then ask how much confidence the surrounding evidence supports.</a:t>
-            </a:r>
-          </a:p>
-          <a:p xmlns:a="http://schemas.openxmlformats.org/drawingml/2006/main">
-            <a:r>
-              <a:t/>
-            </a:r>
-          </a:p>
-          <a:p xmlns:a="http://schemas.openxmlformats.org/drawingml/2006/main">
-            <a:r>
-              <a:t>The interface should help someone distinguish a high predicted risk from a reliable input stream. Those are different questions. A low risk estimate does not prove that a person is safe. A fresh-looking screen does not prove that the model has recent data.</a:t>
-            </a:r>
-          </a:p>
-          <a:p xmlns:a="http://schemas.openxmlformats.org/drawingml/2006/main">
-            <a:r>
-              <a:t/>
-            </a:r>
-          </a:p>
-          <a:p xmlns:a="http://schemas.openxmlformats.org/drawingml/2006/main">
-            <a:r>
-              <a:t>So our design makes the timestamp, model mode and input quality visible beside the result. We are not claiming that this workflow improves clinical outcomes or gives a guaranteed amount of warning. We are presenting a concrete way to examine those questions before any clinical use. To understand the demonstration, we first need to understand who our subject actually is.</a:t>
-            </a:r>
-          </a:p>
-          <a:p xmlns:a="http://schemas.openxmlformats.org/drawingml/2006/main">
-            <a:r>
-              <a:t/>
-            </a:r>
-          </a:p>
-          <a:p xmlns:a="http://schemas.openxmlformats.org/drawingml/2006/main">
-            <a:r>
-              <a:t>SOURCE BASELINE: 1ab28f31fcc0954cf417bb10aafd4c785364e280</a:t>
-            </a:r>
-          </a:p>
-          <a:p xmlns:a="http://schemas.openxmlformats.org/drawingml/2006/main">
-            <a:r>
-              <a:t>https://github.com/AkshayAlgoX/T2D-Glucose-Digital-Twin./blob/1ab28f31fcc0954cf417bb10aafd4c785364e280/src/components/digital-twin/PatientWorkspace.tsx</a:t>
-            </a:r>
-          </a:p>
-          <a:p xmlns:a="http://schemas.openxmlformats.org/drawingml/2006/main">
-            <a:r>
-              <a:t>https://github.com/AkshayAlgoX/T2D-Glucose-Digital-Twin./blob/1ab28f31fcc0954cf417bb10aafd4c785364e280/README.md</a:t>
-            </a:r>
-          </a:p>
-          <a:p xmlns:a="http://schemas.openxmlformats.org/drawingml/2006/main">
-            <a:r>
-              <a:t>Screenshots are supplied recorded evidence, not independently reproduced. EW-01 status comes from supplied project record.</a:t>
+              <a:t>SOURCES (repository paths at the submission commit): src/components/digital-twin/PatientWorkspace.tsx; README.md</a:t>
             </a:r>
           </a:p>
         </p:txBody>
@@ -1485,82 +1215,43 @@
           <a:lstStyle xmlns:a="http://schemas.openxmlformats.org/drawingml/2006/main"/>
           <a:p xmlns:a="http://schemas.openxmlformats.org/drawingml/2006/main">
             <a:r>
-              <a:t>TIME 03:00–04:30</a:t>
+              <a:t>PRESENTER Akshaya</a:t>
             </a:r>
           </a:p>
+          <a:p xmlns:a="http://schemas.openxmlformats.org/drawingml/2006/main"/>
           <a:p xmlns:a="http://schemas.openxmlformats.org/drawingml/2006/main">
             <a:r>
-              <a:t>PRESENTER Akshaya</a:t>
+              <a:t>SCREEN: Slide 3. Explain the cohort counts without opening any held-out files. The demonstration uses training-split subjects only; never select a test-split subject.</a:t>
             </a:r>
           </a:p>
+          <a:p xmlns:a="http://schemas.openxmlformats.org/drawingml/2006/main"/>
           <a:p xmlns:a="http://schemas.openxmlformats.org/drawingml/2006/main">
             <a:r>
-              <a:t>SCREEN: Slide 3. Explain the cohort counts without opening any held-out files. P0003 is the planned training-partition demo subject; confirm it in rehearsal. Never select a test-partition subject for this recording.</a:t>
+              <a:t>Our subjects come from the existing synthetic cohort shipped with the project. There is no real patient behind any identifier we use. The served run records 293 active synthetic subjects. Its manifest records a split of 205 training subjects, 44 validation subjects and 44 test subjects.</a:t>
             </a:r>
           </a:p>
+          <a:p xmlns:a="http://schemas.openxmlformats.org/drawingml/2006/main"/>
           <a:p xmlns:a="http://schemas.openxmlformats.org/drawingml/2006/main">
             <a:r>
-              <a:t/>
+              <a:t>For this demonstration we use synthetic subjects from the training partition only. The screenshots in this deck show P0001 and P0095, both training-split subjects in the run's split file. That keeps the demonstration separate from held-out evaluation. We are replaying existing data, not collecting new data or generating a new cohort.</a:t>
             </a:r>
           </a:p>
+          <a:p xmlns:a="http://schemas.openxmlformats.org/drawingml/2006/main"/>
           <a:p xmlns:a="http://schemas.openxmlformats.org/drawingml/2006/main">
             <a:r>
-              <a:t>Our subject comes from the existing synthetic cohort shipped with the project. There is no real patient behind the identifier we will use. The served run records 293 active synthetic subjects. Its manifest records a split of 205 training subjects, 44 validation subjects and 44 test subjects.</a:t>
+              <a:t>The model receives glucose history and structured context. The dashboard can display fields such as age, HbA1c and medication classes when the response includes them. These are synthetic attributes. A medication class is descriptive context, not a prescription. A model estimate of physiological state is not a measured laboratory result.</a:t>
             </a:r>
           </a:p>
+          <a:p xmlns:a="http://schemas.openxmlformats.org/drawingml/2006/main"/>
           <a:p xmlns:a="http://schemas.openxmlformats.org/drawingml/2006/main">
             <a:r>
-              <a:t/>
+              <a:t>Replay also changes the meaning of time on screen. The browser can receive an update every few seconds while the displayed synthetic timestamp advances by five minutes. We read that recorded timestamp rather than confuse it with the clock on our computer. Nikhil will now show how those inputs reach the workspace.</a:t>
             </a:r>
           </a:p>
+          <a:p xmlns:a="http://schemas.openxmlformats.org/drawingml/2006/main"/>
           <a:p xmlns:a="http://schemas.openxmlformats.org/drawingml/2006/main">
             <a:r>
-              <a:t>For this demonstration we plan to use P0003, a synthetic Type 2 subject in the training partition. That selection keeps the recording separate from held-out evaluation. We are replaying existing data, not collecting new data or generating a new cohort for this video.</a:t>
-            </a:r>
-          </a:p>
-          <a:p xmlns:a="http://schemas.openxmlformats.org/drawingml/2006/main">
-            <a:r>
-              <a:t/>
-            </a:r>
-          </a:p>
-          <a:p xmlns:a="http://schemas.openxmlformats.org/drawingml/2006/main">
-            <a:r>
-              <a:t>The model receives glucose history and structured context. The dashboard can display fields such as age, HbA1c and medication classes when the response includes them. These are synthetic attributes. A medication class is descriptive context, not a prescription. A model estimate of physiological state is not a measured laboratory result.</a:t>
-            </a:r>
-          </a:p>
-          <a:p xmlns:a="http://schemas.openxmlformats.org/drawingml/2006/main">
-            <a:r>
-              <a:t/>
-            </a:r>
-          </a:p>
-          <a:p xmlns:a="http://schemas.openxmlformats.org/drawingml/2006/main">
-            <a:r>
-              <a:t>Replay also changes the meaning of time on screen. The browser can receive an update every few seconds while the displayed synthetic timestamp advances by five minutes. We will read that recorded timestamp rather than confuse it with the clock on our computer. Nikhil will now show how those inputs reach the workspace.</a:t>
-            </a:r>
-          </a:p>
-          <a:p xmlns:a="http://schemas.openxmlformats.org/drawingml/2006/main">
-            <a:r>
-              <a:t/>
-            </a:r>
-          </a:p>
-          <a:p xmlns:a="http://schemas.openxmlformats.org/drawingml/2006/main">
-            <a:r>
-              <a:t>SOURCE BASELINE: 1ab28f31fcc0954cf417bb10aafd4c785364e280</a:t>
-            </a:r>
-          </a:p>
-          <a:p xmlns:a="http://schemas.openxmlformats.org/drawingml/2006/main">
-            <a:r>
-              <a:t>https://github.com/AkshayAlgoX/T2D-Glucose-Digital-Twin./blob/1ab28f31fcc0954cf417bb10aafd4c785364e280/runs/pr_tft_ablation_arm_d/run_manifest.json</a:t>
-            </a:r>
-          </a:p>
-          <a:p xmlns:a="http://schemas.openxmlformats.org/drawingml/2006/main">
-            <a:r>
-              <a:t>https://github.com/AkshayAlgoX/T2D-Glucose-Digital-Twin./blob/1ab28f31fcc0954cf417bb10aafd4c785364e280/backend/serve_pr_tft.py</a:t>
-            </a:r>
-          </a:p>
-          <a:p xmlns:a="http://schemas.openxmlformats.org/drawingml/2006/main">
-            <a:r>
-              <a:t>Screenshots are supplied recorded evidence, not independently reproduced. EW-01 status comes from supplied project record.</a:t>
+              <a:t>SOURCES (repository paths at the submission commit): runs/pr_tft_ablation_arm_d/run_manifest.json; runs/pr_tft_ablation_arm_d/split.json; backend/serve_pr_tft.py</a:t>
             </a:r>
           </a:p>
         </p:txBody>
@@ -1630,87 +1321,43 @@
           <a:lstStyle xmlns:a="http://schemas.openxmlformats.org/drawingml/2006/main"/>
           <a:p xmlns:a="http://schemas.openxmlformats.org/drawingml/2006/main">
             <a:r>
-              <a:t>TIME 04:30–06:00</a:t>
+              <a:t>PRESENTER Nikhil</a:t>
             </a:r>
           </a:p>
+          <a:p xmlns:a="http://schemas.openxmlformats.org/drawingml/2006/main"/>
           <a:p xmlns:a="http://schemas.openxmlformats.org/drawingml/2006/main">
             <a:r>
-              <a:t>PRESENTER Nikhil</a:t>
+              <a:t>SCREEN: Slide 4. Read the five numbered stages from top to bottom. This is the architecture slide, not a running terminal. No commands or credentials on screen.</a:t>
             </a:r>
           </a:p>
+          <a:p xmlns:a="http://schemas.openxmlformats.org/drawingml/2006/main"/>
           <a:p xmlns:a="http://schemas.openxmlformats.org/drawingml/2006/main">
             <a:r>
-              <a:t>SCREEN: Slide 4. Read the five numbered stages from left to right / top to bottom. This is the architecture slide, not a running terminal. No commands or credentials on screen.</a:t>
+              <a:t>There are five stages in this path. First, the existing synthetic records provide the observable input history and context. Second, the physiological twin produces a prior trajectory. Third, the PR-TFT model produces forecasts and risk estimates using its learned representation. Fourth, the FastAPI service packages those outputs into the versioned response contract. Finally, the Next.js application validates and presents the response.</a:t>
             </a:r>
           </a:p>
+          <a:p xmlns:a="http://schemas.openxmlformats.org/drawingml/2006/main"/>
           <a:p xmlns:a="http://schemas.openxmlformats.org/drawingml/2006/main">
             <a:r>
-              <a:t/>
+              <a:t>The implementation uses Python, PyTorch and Lightning for the model workflow, with FastAPI for serving. The interface uses Next.js 16, React and TypeScript, with D3 for the visualizations. Zod validation checks responses in the web application.</a:t>
             </a:r>
           </a:p>
+          <a:p xmlns:a="http://schemas.openxmlformats.org/drawingml/2006/main"/>
           <a:p xmlns:a="http://schemas.openxmlformats.org/drawingml/2006/main">
             <a:r>
-              <a:t>There are five stages in this path. First, the existing synthetic records provide the observable input history and context. Second, the physiological twin produces a prior trajectory. Third, the PR-TFT model produces forecasts and risk estimates using its learned representation. Fourth, the FastAPI service packages those outputs into the versioned response contract. Finally, the Next.js application validates and presents the response.</a:t>
+              <a:t>That separation matters when interpreting a demonstration. A screenshot proves that a screen existed. A connected recording can show that a particular input reached the serving path and produced an observable update. Neither of those observations, on its own, reproduces training or establishes clinical effectiveness.</a:t>
             </a:r>
           </a:p>
+          <a:p xmlns:a="http://schemas.openxmlformats.org/drawingml/2006/main"/>
           <a:p xmlns:a="http://schemas.openxmlformats.org/drawingml/2006/main">
             <a:r>
-              <a:t/>
+              <a:t>The served model version is pinned by the run manifest listed in these notes. We keep the checkpoint and its manifest together rather than replacing artifacts to make a demo look successful. The next question is why the model combines a physiological component with a learned one.</a:t>
             </a:r>
           </a:p>
+          <a:p xmlns:a="http://schemas.openxmlformats.org/drawingml/2006/main"/>
           <a:p xmlns:a="http://schemas.openxmlformats.org/drawingml/2006/main">
             <a:r>
-              <a:t>The implementation uses Python, PyTorch and Lightning for the model workflow, with FastAPI for serving. The interface uses Next.js 16, React and TypeScript, with D3 for the visualizations. Zod validation checks responses in the web application.</a:t>
-            </a:r>
-          </a:p>
-          <a:p xmlns:a="http://schemas.openxmlformats.org/drawingml/2006/main">
-            <a:r>
-              <a:t/>
-            </a:r>
-          </a:p>
-          <a:p xmlns:a="http://schemas.openxmlformats.org/drawingml/2006/main">
-            <a:r>
-              <a:t>That separation matters when interpreting a demonstration. A screenshot proves that a screen existed. A connected recording can show that a particular input reached the serving path and produced an observable update. Neither of those observations, on its own, reproduces training or establishes clinical effectiveness.</a:t>
-            </a:r>
-          </a:p>
-          <a:p xmlns:a="http://schemas.openxmlformats.org/drawingml/2006/main">
-            <a:r>
-              <a:t/>
-            </a:r>
-          </a:p>
-          <a:p xmlns:a="http://schemas.openxmlformats.org/drawingml/2006/main">
-            <a:r>
-              <a:t>The version we prepared for this recording is pinned in the accompanying notes. We keep the checkpoint and its manifest together rather than replacing artifacts to make a demo look successful. The next question is why the model combines a physiological component with a learned one.</a:t>
-            </a:r>
-          </a:p>
-          <a:p xmlns:a="http://schemas.openxmlformats.org/drawingml/2006/main">
-            <a:r>
-              <a:t/>
-            </a:r>
-          </a:p>
-          <a:p xmlns:a="http://schemas.openxmlformats.org/drawingml/2006/main">
-            <a:r>
-              <a:t>SOURCE BASELINE: 1ab28f31fcc0954cf417bb10aafd4c785364e280</a:t>
-            </a:r>
-          </a:p>
-          <a:p xmlns:a="http://schemas.openxmlformats.org/drawingml/2006/main">
-            <a:r>
-              <a:t>https://github.com/AkshayAlgoX/T2D-Glucose-Digital-Twin./blob/1ab28f31fcc0954cf417bb10aafd4c785364e280/backend/serve_pr_tft.py</a:t>
-            </a:r>
-          </a:p>
-          <a:p xmlns:a="http://schemas.openxmlformats.org/drawingml/2006/main">
-            <a:r>
-              <a:t>https://github.com/AkshayAlgoX/T2D-Glucose-Digital-Twin./blob/1ab28f31fcc0954cf417bb10aafd4c785364e280/package.json</a:t>
-            </a:r>
-          </a:p>
-          <a:p xmlns:a="http://schemas.openxmlformats.org/drawingml/2006/main">
-            <a:r>
-              <a:t>https://github.com/AkshayAlgoX/T2D-Glucose-Digital-Twin./blob/1ab28f31fcc0954cf417bb10aafd4c785364e280/src/hooks/useRealtimeTelemetry.ts</a:t>
-            </a:r>
-          </a:p>
-          <a:p xmlns:a="http://schemas.openxmlformats.org/drawingml/2006/main">
-            <a:r>
-              <a:t>Screenshots are supplied recorded evidence, not independently reproduced. EW-01 status comes from supplied project record.</a:t>
+              <a:t>SOURCES (repository paths at the submission commit): backend/serve_pr_tft.py; package.json; src/hooks/useRealtimeTelemetry.ts; runs/pr_tft_ablation_arm_d/run_manifest.json</a:t>
             </a:r>
           </a:p>
         </p:txBody>
@@ -1780,82 +1427,43 @@
           <a:lstStyle xmlns:a="http://schemas.openxmlformats.org/drawingml/2006/main"/>
           <a:p xmlns:a="http://schemas.openxmlformats.org/drawingml/2006/main">
             <a:r>
-              <a:t>TIME 06:00–07:30</a:t>
+              <a:t>PRESENTER Akshaya</a:t>
             </a:r>
           </a:p>
+          <a:p xmlns:a="http://schemas.openxmlformats.org/drawingml/2006/main"/>
           <a:p xmlns:a="http://schemas.openxmlformats.org/drawingml/2006/main">
             <a:r>
-              <a:t>PRESENTER Akshaya</a:t>
+              <a:t>SCREEN: Slide 5. Point to the two model descriptions, then the checkpoint statement. Avoid saying the twin is a validated replica of a real person.</a:t>
             </a:r>
           </a:p>
+          <a:p xmlns:a="http://schemas.openxmlformats.org/drawingml/2006/main"/>
           <a:p xmlns:a="http://schemas.openxmlformats.org/drawingml/2006/main">
             <a:r>
-              <a:t>SCREEN: Slide 5. Point to the two model descriptions, then the checkpoint statement. Avoid saying the twin is a validated replica of a real person.</a:t>
+              <a:t>The physiological component represents a simplified glucose process. In the served configuration, the project uses a UKF twin prior in S3 mode. The learned component is a physiology-regularized Temporal Fusion Transformer, which we call PR-TFT.</a:t>
             </a:r>
           </a:p>
+          <a:p xmlns:a="http://schemas.openxmlformats.org/drawingml/2006/main"/>
           <a:p xmlns:a="http://schemas.openxmlformats.org/drawingml/2006/main">
             <a:r>
-              <a:t/>
+              <a:t>The motivation is to combine a structured model of the process with patterns learned from the available histories. That motivation should not be confused with a proof that physiology makes every prediction correct. Both components have assumptions, and the synthetic data limit what we can conclude about their behavior in real people.</a:t>
             </a:r>
           </a:p>
+          <a:p xmlns:a="http://schemas.openxmlformats.org/drawingml/2006/main"/>
           <a:p xmlns:a="http://schemas.openxmlformats.org/drawingml/2006/main">
             <a:r>
-              <a:t>The physiological component represents a simplified glucose process. In the served configuration, the project uses a UKF twin prior in S3 mode. The learned component is a physiology-regularized Temporal Fusion Transformer, which we call PR-TFT.</a:t>
+              <a:t>At serving time, the software loads the existing checkpoint, configuration, normalization and calibration artifacts. It also uses the canonical state artifacts associated with the run. Hashes let us check whether we are discussing the same files. They do not establish that the experiment has been independently repeated.</a:t>
             </a:r>
           </a:p>
+          <a:p xmlns:a="http://schemas.openxmlformats.org/drawingml/2006/main"/>
           <a:p xmlns:a="http://schemas.openxmlformats.org/drawingml/2006/main">
             <a:r>
-              <a:t/>
+              <a:t>There is another important qualification in the manifest: the training run records a working tree with uncommitted changes. We keep that provenance visible instead of describing the training run as a perfectly clean reproduction. For the viewer, the practical output of this model is a trajectory with uncertainty and a separate estimate of spike-onset risk. Let us look at how to read those outputs.</a:t>
             </a:r>
           </a:p>
+          <a:p xmlns:a="http://schemas.openxmlformats.org/drawingml/2006/main"/>
           <a:p xmlns:a="http://schemas.openxmlformats.org/drawingml/2006/main">
             <a:r>
-              <a:t>The motivation is to combine a structured model of the process with patterns learned from the available histories. That motivation should not be confused with a proof that physiology makes every prediction correct. Both components have assumptions, and the synthetic data limit what we can conclude about their behavior in real people.</a:t>
-            </a:r>
-          </a:p>
-          <a:p xmlns:a="http://schemas.openxmlformats.org/drawingml/2006/main">
-            <a:r>
-              <a:t/>
-            </a:r>
-          </a:p>
-          <a:p xmlns:a="http://schemas.openxmlformats.org/drawingml/2006/main">
-            <a:r>
-              <a:t>At serving time, the software loads the existing checkpoint, configuration, normalization and calibration artifacts. It also uses the canonical state artifacts associated with the run. Hashes let us check whether we are discussing the same files. They do not establish that the experiment has been independently repeated.</a:t>
-            </a:r>
-          </a:p>
-          <a:p xmlns:a="http://schemas.openxmlformats.org/drawingml/2006/main">
-            <a:r>
-              <a:t/>
-            </a:r>
-          </a:p>
-          <a:p xmlns:a="http://schemas.openxmlformats.org/drawingml/2006/main">
-            <a:r>
-              <a:t>There is another important qualification in the manifest: the training run records a working tree with uncommitted changes. We keep that provenance visible instead of describing the training run as a perfectly clean reproduction. For the viewer, the practical output of this model is a trajectory with uncertainty and a separate estimate of spike-onset risk. Let us look at how to read those outputs.</a:t>
-            </a:r>
-          </a:p>
-          <a:p xmlns:a="http://schemas.openxmlformats.org/drawingml/2006/main">
-            <a:r>
-              <a:t/>
-            </a:r>
-          </a:p>
-          <a:p xmlns:a="http://schemas.openxmlformats.org/drawingml/2006/main">
-            <a:r>
-              <a:t>SOURCE BASELINE: 1ab28f31fcc0954cf417bb10aafd4c785364e280</a:t>
-            </a:r>
-          </a:p>
-          <a:p xmlns:a="http://schemas.openxmlformats.org/drawingml/2006/main">
-            <a:r>
-              <a:t>https://github.com/AkshayAlgoX/T2D-Glucose-Digital-Twin./blob/1ab28f31fcc0954cf417bb10aafd4c785364e280/backend/serve_pr_tft.py</a:t>
-            </a:r>
-          </a:p>
-          <a:p xmlns:a="http://schemas.openxmlformats.org/drawingml/2006/main">
-            <a:r>
-              <a:t>https://github.com/AkshayAlgoX/T2D-Glucose-Digital-Twin./blob/1ab28f31fcc0954cf417bb10aafd4c785364e280/runs/pr_tft_ablation_arm_d/run_manifest.json</a:t>
-            </a:r>
-          </a:p>
-          <a:p xmlns:a="http://schemas.openxmlformats.org/drawingml/2006/main">
-            <a:r>
-              <a:t>Screenshots are supplied recorded evidence, not independently reproduced. EW-01 status comes from supplied project record.</a:t>
+              <a:t>SOURCES (repository paths at the submission commit): backend/serve_pr_tft.py; runs/pr_tft_ablation_arm_d/run_manifest.json</a:t>
             </a:r>
           </a:p>
         </p:txBody>
@@ -1925,92 +1533,55 @@
           <a:lstStyle xmlns:a="http://schemas.openxmlformats.org/drawingml/2006/main"/>
           <a:p xmlns:a="http://schemas.openxmlformats.org/drawingml/2006/main">
             <a:r>
-              <a:t>TIME 07:30–09:00</a:t>
+              <a:t>PRESENTER Nikhil</a:t>
             </a:r>
           </a:p>
+          <a:p xmlns:a="http://schemas.openxmlformats.org/drawingml/2006/main"/>
           <a:p xmlns:a="http://schemas.openxmlformats.org/drawingml/2006/main">
             <a:r>
-              <a:t>PRESENTER Nikhil</a:t>
+              <a:t>SCREEN: Slide 6. The screenshot is a recorded repository image of synthetic subject P0001 (training split). Point at the anchor and interval rather than reading values as results.</a:t>
             </a:r>
           </a:p>
+          <a:p xmlns:a="http://schemas.openxmlformats.org/drawingml/2006/main"/>
           <a:p xmlns:a="http://schemas.openxmlformats.org/drawingml/2006/main">
             <a:r>
-              <a:t>SCREEN: Slide 6. Use the repository live-replay screenshot only as a labelled recorded illustration. Point at the anchor and interval, not a specific invented value. The next segment switches to the real application.</a:t>
+              <a:t>The forecast covers the next 120 minutes at five-minute steps. The median is one summary of the predicted trajectory. The surrounding quantiles describe uncertainty under the model's assumptions. The 80 percent interval uses the tenth and ninetieth percentiles, with a conformal adjustment fitted on validation patients.</a:t>
             </a:r>
           </a:p>
+          <a:p xmlns:a="http://schemas.openxmlformats.org/drawingml/2006/main"/>
           <a:p xmlns:a="http://schemas.openxmlformats.org/drawingml/2006/main">
             <a:r>
-              <a:t/>
+              <a:t>An interval is not a promise that a future reading must stay inside it. Its recorded 80 percent coverage was measured on the same validation patients used to fit that adjustment, so it is an in-sample diagnostic. It is not an individual guarantee and does not automatically transfer to a new population.</a:t>
             </a:r>
           </a:p>
+          <a:p xmlns:a="http://schemas.openxmlformats.org/drawingml/2006/main"/>
           <a:p xmlns:a="http://schemas.openxmlformats.org/drawingml/2006/main">
             <a:r>
-              <a:t>The forecast covers the next 120 minutes at five-minute steps. The median is one summary of the predicted trajectory. The surrounding quantiles describe uncertainty under the model's assumptions. The 80 percent interval uses the tenth and ninetieth percentiles, with conformal adjustment fitted on validation patients.</a:t>
+              <a:t>The risk panel answers a related but distinct question: what is the model's estimated probability of a spike onset within the next two hours? Alert presentation follows a served policy. We should not infer clinical urgency solely from a color or a threshold.</a:t>
             </a:r>
           </a:p>
+          <a:p xmlns:a="http://schemas.openxmlformats.org/drawingml/2006/main"/>
           <a:p xmlns:a="http://schemas.openxmlformats.org/drawingml/2006/main">
             <a:r>
-              <a:t/>
+              <a:t>The contribution display is also easy to overread. It decomposes the arithmetic of the model's median forecast near its peak. It does not prove that any displayed component caused a real person's glucose to change.</a:t>
             </a:r>
           </a:p>
+          <a:p xmlns:a="http://schemas.openxmlformats.org/drawingml/2006/main"/>
           <a:p xmlns:a="http://schemas.openxmlformats.org/drawingml/2006/main">
             <a:r>
-              <a:t>An interval is not a promise that a future reading must stay inside it. Its recorded coverage summarizes a collection of synthetic validation examples. It is not an individual guarantee and does not automatically transfer to a new population.</a:t>
+              <a:t>The image on this slide is a recorded repository screenshot, labelled as such. Next, the connected application.</a:t>
             </a:r>
           </a:p>
+          <a:p xmlns:a="http://schemas.openxmlformats.org/drawingml/2006/main"/>
           <a:p xmlns:a="http://schemas.openxmlformats.org/drawingml/2006/main">
             <a:r>
-              <a:t/>
+              <a:t>SOURCES (repository paths at the submission commit): src/components/digital-twin/ForecastCanvas.tsx; docs/presentation/screens/slide6-reading-forecast.png</a:t>
             </a:r>
           </a:p>
+          <a:p xmlns:a="http://schemas.openxmlformats.org/drawingml/2006/main"/>
           <a:p xmlns:a="http://schemas.openxmlformats.org/drawingml/2006/main">
             <a:r>
-              <a:t>The risk panel answers a related but distinct question: what is the model's estimated probability of a spike onset within the next two hours? Alert presentation follows a served policy. We should not infer clinical urgency solely from a color or a threshold.</a:t>
-            </a:r>
-          </a:p>
-          <a:p xmlns:a="http://schemas.openxmlformats.org/drawingml/2006/main">
-            <a:r>
-              <a:t/>
-            </a:r>
-          </a:p>
-          <a:p xmlns:a="http://schemas.openxmlformats.org/drawingml/2006/main">
-            <a:r>
-              <a:t>The contribution display is also easy to overread. It decomposes the arithmetic of the model's median forecast near its peak. It does not prove that any displayed component caused a real person's glucose to change.</a:t>
-            </a:r>
-          </a:p>
-          <a:p xmlns:a="http://schemas.openxmlformats.org/drawingml/2006/main">
-            <a:r>
-              <a:t/>
-            </a:r>
-          </a:p>
-          <a:p xmlns:a="http://schemas.openxmlformats.org/drawingml/2006/main">
-            <a:r>
-              <a:t>The image on this slide is a repository recording artifact, labelled as such. We now switch to the connected application and read only the values that actually arrive during our recording.</a:t>
-            </a:r>
-          </a:p>
-          <a:p xmlns:a="http://schemas.openxmlformats.org/drawingml/2006/main">
-            <a:r>
-              <a:t/>
-            </a:r>
-          </a:p>
-          <a:p xmlns:a="http://schemas.openxmlformats.org/drawingml/2006/main">
-            <a:r>
-              <a:t>SOURCE BASELINE: 1ab28f31fcc0954cf417bb10aafd4c785364e280</a:t>
-            </a:r>
-          </a:p>
-          <a:p xmlns:a="http://schemas.openxmlformats.org/drawingml/2006/main">
-            <a:r>
-              <a:t>https://github.com/AkshayAlgoX/T2D-Glucose-Digital-Twin./blob/1ab28f31fcc0954cf417bb10aafd4c785364e280/docs/screenshots/README.md</a:t>
-            </a:r>
-          </a:p>
-          <a:p xmlns:a="http://schemas.openxmlformats.org/drawingml/2006/main">
-            <a:r>
-              <a:t>https://github.com/AkshayAlgoX/T2D-Glucose-Digital-Twin./blob/1ab28f31fcc0954cf417bb10aafd4c785364e280/src/components/digital-twin/ForecastCanvas.tsx</a:t>
-            </a:r>
-          </a:p>
-          <a:p xmlns:a="http://schemas.openxmlformats.org/drawingml/2006/main">
-            <a:r>
-              <a:t>Screenshots are supplied recorded evidence, not independently reproduced. EW-01 status comes from supplied project record.</a:t>
+              <a:t>Screenshots are recorded repository images of synthetic subjects; subject IDs were matched from the on-screen identifier (uuid5 in backend/serve_pr_tft.py) to runs/pr_tft_ablation_arm_d/split.json.</a:t>
             </a:r>
           </a:p>
         </p:txBody>
@@ -2080,122 +1651,67 @@
           <a:lstStyle xmlns:a="http://schemas.openxmlformats.org/drawingml/2006/main"/>
           <a:p xmlns:a="http://schemas.openxmlformats.org/drawingml/2006/main">
             <a:r>
-              <a:t>TIME 09:00–11:30</a:t>
+              <a:t>PRESENTER Nikhil + Akshaya</a:t>
             </a:r>
           </a:p>
+          <a:p xmlns:a="http://schemas.openxmlformats.org/drawingml/2006/main"/>
           <a:p xmlns:a="http://schemas.openxmlformats.org/drawingml/2006/main">
             <a:r>
-              <a:t>PRESENTER Nikhil + Akshaya</a:t>
+              <a:t>SCREEN: Switch from slide 7 to the application (http://127.0.0.1:3000/cohort). Select a training-split subject, confirm the Train label, and open its workspace. Read only the values that actually arrive: replay timestamp, current glucose, model mode and data status. Show at least two successive updates, then the interval and risk panels. Do not open test-split subjects. If no valid forecast arrives, say so rather than substituting fixtures.</a:t>
             </a:r>
           </a:p>
+          <a:p xmlns:a="http://schemas.openxmlformats.org/drawingml/2006/main"/>
           <a:p xmlns:a="http://schemas.openxmlformats.org/drawingml/2006/main">
             <a:r>
-              <a:t>SCREEN: Switch from slide 7 to the real application at http://127.0.0.1:3000/cohort ONLY after a separately verified bounded recording plan. 00–25s: search P0003, confirm Type 2 and Train, open its workspace. 25–55s: Nikhil points to Replay, current glucose, UTC anchor, Full model and Data status; read actual values. 55–90s: Akshaya points to clinical context and EHR-derived prior wording. 90–120s: compare at least two actual updates, read the new anchor and risk. 120–150s: show interval and risk/contribution panels. This clip must fit inside the approved service budget, including startup. If it cannot, record a shorter genuine clip and explain it with slides. No held-out subjects, /twin calls or scenario requests in this segment. If no valid forecast arrives, stop and resolve the issue; do not replace this with fixtures.</a:t>
+              <a:t>NIKHIL: We are now in the application. This is the synthetic cohort directory. I am selecting a synthetic subject from the training split. Before reading a forecast, I am checking the identity and the synthetic-data label.</a:t>
             </a:r>
           </a:p>
+          <a:p xmlns:a="http://schemas.openxmlformats.org/drawingml/2006/main"/>
           <a:p xmlns:a="http://schemas.openxmlformats.org/drawingml/2006/main">
             <a:r>
-              <a:t/>
+              <a:t>[Read the actual current glucose, UTC forecast timestamp, model mode and data-quality state. Pause while pointing to each.]</a:t>
             </a:r>
           </a:p>
+          <a:p xmlns:a="http://schemas.openxmlformats.org/drawingml/2006/main"/>
           <a:p xmlns:a="http://schemas.openxmlformats.org/drawingml/2006/main">
             <a:r>
-              <a:t>NIKHIL: We are now in the application. This is the synthetic cohort directory. I am selecting our agreed training subject, P0003. Before reading a forecast, I am checking the identity and the synthetic-data label.</a:t>
+              <a:t>AKSHAYA: The clinical context belongs to this synthetic subject. The medication entries describe the recorded input classes. The insulin-sensitivity display explicitly identifies an EHR-derived prior. We should not call it a newly measured physiological property.</a:t>
             </a:r>
           </a:p>
+          <a:p xmlns:a="http://schemas.openxmlformats.org/drawingml/2006/main"/>
           <a:p xmlns:a="http://schemas.openxmlformats.org/drawingml/2006/main">
             <a:r>
-              <a:t/>
+              <a:t>[Point to the context and prior wording. Allow the next valid update to arrive.]</a:t>
             </a:r>
           </a:p>
+          <a:p xmlns:a="http://schemas.openxmlformats.org/drawingml/2006/main"/>
           <a:p xmlns:a="http://schemas.openxmlformats.org/drawingml/2006/main">
             <a:r>
-              <a:t>[Read the actual current glucose, UTC forecast timestamp, model mode and data-quality state. Pause while pointing to each.]</a:t>
+              <a:t>NIKHIL: Now compare the timestamp with the previous one. The displayed trajectory and risk belong to that forecast anchor. We are watching a replay of synthetic observations, not a sensor attached to someone today.</a:t>
             </a:r>
           </a:p>
+          <a:p xmlns:a="http://schemas.openxmlformats.org/drawingml/2006/main"/>
           <a:p xmlns:a="http://schemas.openxmlformats.org/drawingml/2006/main">
             <a:r>
-              <a:t/>
+              <a:t>[Read the second actual timestamp and risk. If no second update arrives, say: “We have only observed one forecast in this window.”]</a:t>
             </a:r>
           </a:p>
+          <a:p xmlns:a="http://schemas.openxmlformats.org/drawingml/2006/main"/>
           <a:p xmlns:a="http://schemas.openxmlformats.org/drawingml/2006/main">
             <a:r>
-              <a:t>AKSHAYA: The clinical context belongs to this synthetic subject. The medication entries describe the recorded input classes. The insulin-sensitivity display explicitly identifies an EHR-derived prior. We should not call it a newly measured physiological property.</a:t>
+              <a:t>AKSHAYA: Notice the median and the interval around it. We can inspect the model's estimate and its uncertainty together. The risk value describes the next two hours from this anchor. It does not tell us to administer a treatment.</a:t>
             </a:r>
           </a:p>
+          <a:p xmlns:a="http://schemas.openxmlformats.org/drawingml/2006/main"/>
           <a:p xmlns:a="http://schemas.openxmlformats.org/drawingml/2006/main">
             <a:r>
-              <a:t/>
+              <a:t>NIKHIL: This is the behavior we wanted to make inspectable: a named synthetic subject, a timestamped response and visible uncertainty. We will now leave this connected segment and explain how the application handles a fixed point in the replay.</a:t>
             </a:r>
           </a:p>
+          <a:p xmlns:a="http://schemas.openxmlformats.org/drawingml/2006/main"/>
           <a:p xmlns:a="http://schemas.openxmlformats.org/drawingml/2006/main">
             <a:r>
-              <a:t>[Point to the context and prior wording. Allow the next valid update to arrive.]</a:t>
-            </a:r>
-          </a:p>
-          <a:p xmlns:a="http://schemas.openxmlformats.org/drawingml/2006/main">
-            <a:r>
-              <a:t/>
-            </a:r>
-          </a:p>
-          <a:p xmlns:a="http://schemas.openxmlformats.org/drawingml/2006/main">
-            <a:r>
-              <a:t>NIKHIL: Now compare the timestamp with the previous one. The displayed trajectory and risk belong to that forecast anchor. We are watching a replay of synthetic observations, not a sensor attached to someone today.</a:t>
-            </a:r>
-          </a:p>
-          <a:p xmlns:a="http://schemas.openxmlformats.org/drawingml/2006/main">
-            <a:r>
-              <a:t/>
-            </a:r>
-          </a:p>
-          <a:p xmlns:a="http://schemas.openxmlformats.org/drawingml/2006/main">
-            <a:r>
-              <a:t>[Read the second actual timestamp and risk. If no second update arrives, say: “We have only observed one forecast in this window.”]</a:t>
-            </a:r>
-          </a:p>
-          <a:p xmlns:a="http://schemas.openxmlformats.org/drawingml/2006/main">
-            <a:r>
-              <a:t/>
-            </a:r>
-          </a:p>
-          <a:p xmlns:a="http://schemas.openxmlformats.org/drawingml/2006/main">
-            <a:r>
-              <a:t>AKSHAYA: Notice the median and the interval around it. We can inspect the model's estimate and its uncertainty together. The risk value describes the next two hours from this anchor. It does not tell us to administer a treatment.</a:t>
-            </a:r>
-          </a:p>
-          <a:p xmlns:a="http://schemas.openxmlformats.org/drawingml/2006/main">
-            <a:r>
-              <a:t/>
-            </a:r>
-          </a:p>
-          <a:p xmlns:a="http://schemas.openxmlformats.org/drawingml/2006/main">
-            <a:r>
-              <a:t>NIKHIL: This is the behavior we wanted to make inspectable: a named synthetic subject, a timestamped response and visible uncertainty. We will now leave this connected segment and explain how the current release handles a fixed point in the replay.</a:t>
-            </a:r>
-          </a:p>
-          <a:p xmlns:a="http://schemas.openxmlformats.org/drawingml/2006/main">
-            <a:r>
-              <a:t/>
-            </a:r>
-          </a:p>
-          <a:p xmlns:a="http://schemas.openxmlformats.org/drawingml/2006/main">
-            <a:r>
-              <a:t>SOURCE BASELINE: 1ab28f31fcc0954cf417bb10aafd4c785364e280</a:t>
-            </a:r>
-          </a:p>
-          <a:p xmlns:a="http://schemas.openxmlformats.org/drawingml/2006/main">
-            <a:r>
-              <a:t>https://github.com/AkshayAlgoX/T2D-Glucose-Digital-Twin./blob/1ab28f31fcc0954cf417bb10aafd4c785364e280/src/components/digital-twin/PatientWorkspace.tsx</a:t>
-            </a:r>
-          </a:p>
-          <a:p xmlns:a="http://schemas.openxmlformats.org/drawingml/2006/main">
-            <a:r>
-              <a:t>https://github.com/AkshayAlgoX/T2D-Glucose-Digital-Twin./blob/1ab28f31fcc0954cf417bb10aafd4c785364e280/src/app/cohort/page.tsx</a:t>
-            </a:r>
-          </a:p>
-          <a:p xmlns:a="http://schemas.openxmlformats.org/drawingml/2006/main">
-            <a:r>
-              <a:t>Screenshots are supplied recorded evidence, not independently reproduced. EW-01 status comes from supplied project record.</a:t>
+              <a:t>SOURCES (repository paths at the submission commit): src/components/digital-twin/PatientWorkspace.tsx; src/app/cohort/page.tsx</a:t>
             </a:r>
           </a:p>
         </p:txBody>
@@ -2265,97 +1781,55 @@
           <a:lstStyle xmlns:a="http://schemas.openxmlformats.org/drawingml/2006/main"/>
           <a:p xmlns:a="http://schemas.openxmlformats.org/drawingml/2006/main">
             <a:r>
-              <a:t>TIME 11:30–13:00</a:t>
+              <a:t>PRESENTER Akshaya</a:t>
             </a:r>
           </a:p>
+          <a:p xmlns:a="http://schemas.openxmlformats.org/drawingml/2006/main"/>
           <a:p xmlns:a="http://schemas.openxmlformats.org/drawingml/2006/main">
             <a:r>
-              <a:t>PRESENTER Akshaya</a:t>
+              <a:t>SCREEN: Slide 8. Recorded repository screenshot of synthetic subject P0001 (training split) in the pinned state. Interaction: focus the timeline slider and press Space to pin; ArrowLeft steps five minutes within received history; L returns to replay.</a:t>
             </a:r>
           </a:p>
+          <a:p xmlns:a="http://schemas.openxmlformats.org/drawingml/2006/main"/>
           <a:p xmlns:a="http://schemas.openxmlformats.org/drawingml/2006/main">
             <a:r>
-              <a:t>SCREEN: Slide 8 with labelled pinned repository screenshot. Do not keep a service running behind the slides. Describe the exact rehearsal interaction: focus the timeline slider, press Space, confirm Pinned and a stable UTC anchor; ArrowLeft steps five minutes within received history; L returns to replay. Only show a newly recorded clip if separately rehearsed and bounded.</a:t>
+              <a:t>A moving replay is useful for observing updates, but it can be difficult to discuss a result while the anchor keeps changing. The application includes a pinned view to address that interaction.</a:t>
             </a:r>
           </a:p>
+          <a:p xmlns:a="http://schemas.openxmlformats.org/drawingml/2006/main"/>
           <a:p xmlns:a="http://schemas.openxmlformats.org/drawingml/2006/main">
             <a:r>
-              <a:t/>
+              <a:t>The timeline uses received history. Focusing the timeline and pressing Space pins the current cursor, and the header identifies the pinned state. Moving left steps through available time, and returning to replay restores the moving view.</a:t>
             </a:r>
           </a:p>
+          <a:p xmlns:a="http://schemas.openxmlformats.org/drawingml/2006/main"/>
           <a:p xmlns:a="http://schemas.openxmlformats.org/drawingml/2006/main">
             <a:r>
-              <a:t>A moving replay is useful for observing updates, but it can be difficult to discuss a result while the anchor keeps changing. The current release includes a pinned view to address that interaction.</a:t>
+              <a:t>The image here is the repository's recorded pinned state, with its provenance retained. It is useful for explaining the interaction, but we are not presenting it as an action just performed.</a:t>
             </a:r>
           </a:p>
+          <a:p xmlns:a="http://schemas.openxmlformats.org/drawingml/2006/main"/>
           <a:p xmlns:a="http://schemas.openxmlformats.org/drawingml/2006/main">
             <a:r>
-              <a:t/>
+              <a:t>Keeping the time fixed is also important for a scenario request. A comparison should refer to the same subject and the same anchor. If the view changes, the application must avoid presenting an old comparison as though it belongs to the new time.</a:t>
             </a:r>
           </a:p>
+          <a:p xmlns:a="http://schemas.openxmlformats.org/drawingml/2006/main"/>
           <a:p xmlns:a="http://schemas.openxmlformats.org/drawingml/2006/main">
             <a:r>
-              <a:t>The timeline uses received history. In rehearsal, we focus the timeline and press Space to pin the current cursor. The header should identify the pinned state. Moving left steps through available time, and returning to replay restores the moving view. We must verify those actions on the recording version before showing them as a fresh demonstration.</a:t>
+              <a:t>That gives us a natural next question in our story: what happens inside the model if we change one permitted input? The answer is an exploratory projection, with important limits.</a:t>
             </a:r>
           </a:p>
+          <a:p xmlns:a="http://schemas.openxmlformats.org/drawingml/2006/main"/>
           <a:p xmlns:a="http://schemas.openxmlformats.org/drawingml/2006/main">
             <a:r>
-              <a:t/>
+              <a:t>SOURCES (repository paths at the submission commit): src/components/digital-twin/TimeScrubber.tsx; src/components/digital-twin/TimeContext.tsx; docs/presentation/screens/slide8-holding-moment.png</a:t>
             </a:r>
           </a:p>
+          <a:p xmlns:a="http://schemas.openxmlformats.org/drawingml/2006/main"/>
           <a:p xmlns:a="http://schemas.openxmlformats.org/drawingml/2006/main">
             <a:r>
-              <a:t>The image here is the repository's recorded pinned state, with its provenance retained. It is useful for explaining the intended interaction, but we are not presenting it as an action just performed in this recording.</a:t>
-            </a:r>
-          </a:p>
-          <a:p xmlns:a="http://schemas.openxmlformats.org/drawingml/2006/main">
-            <a:r>
-              <a:t/>
-            </a:r>
-          </a:p>
-          <a:p xmlns:a="http://schemas.openxmlformats.org/drawingml/2006/main">
-            <a:r>
-              <a:t>Keeping the time fixed is also important for a scenario request. A comparison should refer to the same subject and the same anchor. If the view changes, the application must avoid presenting an old comparison as though it belongs to the new time.</a:t>
-            </a:r>
-          </a:p>
-          <a:p xmlns:a="http://schemas.openxmlformats.org/drawingml/2006/main">
-            <a:r>
-              <a:t/>
-            </a:r>
-          </a:p>
-          <a:p xmlns:a="http://schemas.openxmlformats.org/drawingml/2006/main">
-            <a:r>
-              <a:t>That gives us a natural next question in our story: what happens inside the model if we change one permitted input? The answer is an exploratory projection, with important limits.</a:t>
-            </a:r>
-          </a:p>
-          <a:p xmlns:a="http://schemas.openxmlformats.org/drawingml/2006/main">
-            <a:r>
-              <a:t/>
-            </a:r>
-          </a:p>
-          <a:p xmlns:a="http://schemas.openxmlformats.org/drawingml/2006/main">
-            <a:r>
-              <a:t>SOURCE BASELINE: 1ab28f31fcc0954cf417bb10aafd4c785364e280</a:t>
-            </a:r>
-          </a:p>
-          <a:p xmlns:a="http://schemas.openxmlformats.org/drawingml/2006/main">
-            <a:r>
-              <a:t>https://github.com/AkshayAlgoX/T2D-Glucose-Digital-Twin./blob/1ab28f31fcc0954cf417bb10aafd4c785364e280/src/components/digital-twin/TimeScrubber.tsx</a:t>
-            </a:r>
-          </a:p>
-          <a:p xmlns:a="http://schemas.openxmlformats.org/drawingml/2006/main">
-            <a:r>
-              <a:t>https://github.com/AkshayAlgoX/T2D-Glucose-Digital-Twin./blob/1ab28f31fcc0954cf417bb10aafd4c785364e280/src/components/digital-twin/TimeContext.tsx</a:t>
-            </a:r>
-          </a:p>
-          <a:p xmlns:a="http://schemas.openxmlformats.org/drawingml/2006/main">
-            <a:r>
-              <a:t>https://github.com/AkshayAlgoX/T2D-Glucose-Digital-Twin./blob/1ab28f31fcc0954cf417bb10aafd4c785364e280/docs/screenshots/README.md</a:t>
-            </a:r>
-          </a:p>
-          <a:p xmlns:a="http://schemas.openxmlformats.org/drawingml/2006/main">
-            <a:r>
-              <a:t>Screenshots are supplied recorded evidence, not independently reproduced. EW-01 status comes from supplied project record.</a:t>
+              <a:t>Screenshots are recorded repository images of synthetic subjects; subject IDs were matched from the on-screen identifier (uuid5 in backend/serve_pr_tft.py) to runs/pr_tft_ablation_arm_d/split.json.</a:t>
             </a:r>
           </a:p>
         </p:txBody>
@@ -2425,87 +1899,49 @@
           <a:lstStyle xmlns:a="http://schemas.openxmlformats.org/drawingml/2006/main"/>
           <a:p xmlns:a="http://schemas.openxmlformats.org/drawingml/2006/main">
             <a:r>
-              <a:t>TIME 13:00–14:30</a:t>
+              <a:t>PRESENTER Nikhil</a:t>
             </a:r>
           </a:p>
+          <a:p xmlns:a="http://schemas.openxmlformats.org/drawingml/2006/main"/>
           <a:p xmlns:a="http://schemas.openxmlformats.org/drawingml/2006/main">
             <a:r>
-              <a:t>PRESENTER Nikhil</a:t>
+              <a:t>SCREEN: Slide 9. Recorded repository screenshot of a 60 g meal scenario for synthetic subject P0001 (training split). Explain the source-backed controls. Read actual returned values only; never pre-script numeric results.</a:t>
             </a:r>
           </a:p>
+          <a:p xmlns:a="http://schemas.openxmlformats.org/drawingml/2006/main"/>
           <a:p xmlns:a="http://schemas.openxmlformats.org/drawingml/2006/main">
             <a:r>
-              <a:t>SCREEN: Slide 9, labelled recorded what-if screenshot. Explain source-backed controls. Optional separately approved clip: pin the training subject, select Meal, enter 30 g and Starts in 0, click Run simulation once, show returned anchor, Peak and Spike risk, then Clear simulation. Never pre-script numeric results. The screenshot used here depicts the repository’s recorded 60 g example, not the planned 30 g rehearsal.</a:t>
+              <a:t>The interface supports meal, activity and skipped-usual-meal scenario inputs. Medication is explicitly not modelled. The request is tied to the subject and the timestamp being viewed, and the web layer validates the response before presenting it.</a:t>
             </a:r>
           </a:p>
+          <a:p xmlns:a="http://schemas.openxmlformats.org/drawingml/2006/main"/>
           <a:p xmlns:a="http://schemas.openxmlformats.org/drawingml/2006/main">
             <a:r>
-              <a:t/>
+              <a:t>The smallest example is a single meal input at a pinned anchor. We enter the carbohydrate amount, run one request, and compare the returned peak and two-hour risk with the baseline shown at that same time. We read the actual response rather than promise that it must move by a particular amount.</a:t>
             </a:r>
           </a:p>
+          <a:p xmlns:a="http://schemas.openxmlformats.org/drawingml/2006/main"/>
           <a:p xmlns:a="http://schemas.openxmlformats.org/drawingml/2006/main">
             <a:r>
-              <a:t>The current interface supports meal, activity and skipped-usual-meal scenario inputs. Medication is explicitly not modelled. The request is tied to the subject and the timestamp being viewed, and the web layer validates the response before presenting it.</a:t>
+              <a:t>The recorded repository image on this slide uses a sixty-gram meal example. It is not a prescription. The interface's own qualification is important: projection under model assumptions, with size not validated.</a:t>
             </a:r>
           </a:p>
+          <a:p xmlns:a="http://schemas.openxmlformats.org/drawingml/2006/main"/>
           <a:p xmlns:a="http://schemas.openxmlformats.org/drawingml/2006/main">
             <a:r>
-              <a:t/>
+              <a:t>Changing a model input is not equivalent to establishing a causal treatment effect in a person. We cannot use these projections to recommend insulin, meals or exercise for an individual. For this prototype, the value is in making the model's assumptions and comparisons visible. That visibility must extend to failure, as well as to successful responses.</a:t>
             </a:r>
           </a:p>
+          <a:p xmlns:a="http://schemas.openxmlformats.org/drawingml/2006/main"/>
           <a:p xmlns:a="http://schemas.openxmlformats.org/drawingml/2006/main">
             <a:r>
-              <a:t>For a separately approved rehearsal, the smallest example is a single meal input at a pinned anchor. We would enter the carbohydrate amount, run one request, and compare the returned peak and two-hour risk with the baseline shown at that same time. We would read the actual response rather than promise that it must move by a particular amount.</a:t>
+              <a:t>SOURCES (repository paths at the submission commit): src/components/digital-twin/ScenarioEditor.tsx; src/hooks/useScenario.ts; src/app/api/forecast/route.ts; docs/presentation/screens/slide9-scenario-projections.png</a:t>
             </a:r>
           </a:p>
+          <a:p xmlns:a="http://schemas.openxmlformats.org/drawingml/2006/main"/>
           <a:p xmlns:a="http://schemas.openxmlformats.org/drawingml/2006/main">
             <a:r>
-              <a:t/>
-            </a:r>
-          </a:p>
-          <a:p xmlns:a="http://schemas.openxmlformats.org/drawingml/2006/main">
-            <a:r>
-              <a:t>The recorded repository image on this slide uses a sixty-gram meal example. It is not a prescription and it is not a new execution in this preparation pass. The interface's own qualification is important: projection under model assumptions, with size not validated.</a:t>
-            </a:r>
-          </a:p>
-          <a:p xmlns:a="http://schemas.openxmlformats.org/drawingml/2006/main">
-            <a:r>
-              <a:t/>
-            </a:r>
-          </a:p>
-          <a:p xmlns:a="http://schemas.openxmlformats.org/drawingml/2006/main">
-            <a:r>
-              <a:t>Changing a model input is not equivalent to establishing a causal treatment effect in a person. We cannot use these projections to recommend insulin, meals or exercise for an individual. For this prototype, the value is in making the model's assumptions and comparisons visible. That visibility must extend to failure, as well as to successful responses.</a:t>
-            </a:r>
-          </a:p>
-          <a:p xmlns:a="http://schemas.openxmlformats.org/drawingml/2006/main">
-            <a:r>
-              <a:t/>
-            </a:r>
-          </a:p>
-          <a:p xmlns:a="http://schemas.openxmlformats.org/drawingml/2006/main">
-            <a:r>
-              <a:t>SOURCE BASELINE: 1ab28f31fcc0954cf417bb10aafd4c785364e280</a:t>
-            </a:r>
-          </a:p>
-          <a:p xmlns:a="http://schemas.openxmlformats.org/drawingml/2006/main">
-            <a:r>
-              <a:t>https://github.com/AkshayAlgoX/T2D-Glucose-Digital-Twin./blob/1ab28f31fcc0954cf417bb10aafd4c785364e280/src/components/digital-twin/ScenarioEditor.tsx</a:t>
-            </a:r>
-          </a:p>
-          <a:p xmlns:a="http://schemas.openxmlformats.org/drawingml/2006/main">
-            <a:r>
-              <a:t>https://github.com/AkshayAlgoX/T2D-Glucose-Digital-Twin./blob/1ab28f31fcc0954cf417bb10aafd4c785364e280/src/app/api/patients/[id]/scenario/route.ts</a:t>
-            </a:r>
-          </a:p>
-          <a:p xmlns:a="http://schemas.openxmlformats.org/drawingml/2006/main">
-            <a:r>
-              <a:t>https://github.com/AkshayAlgoX/T2D-Glucose-Digital-Twin./blob/1ab28f31fcc0954cf417bb10aafd4c785364e280/docs/screenshots/README.md</a:t>
-            </a:r>
-          </a:p>
-          <a:p xmlns:a="http://schemas.openxmlformats.org/drawingml/2006/main">
-            <a:r>
-              <a:t>Screenshots are supplied recorded evidence, not independently reproduced. EW-01 status comes from supplied project record.</a:t>
+              <a:t>Screenshots are recorded repository images of synthetic subjects; subject IDs were matched from the on-screen identifier (uuid5 in backend/serve_pr_tft.py) to runs/pr_tft_ablation_arm_d/split.json.</a:t>
             </a:r>
           </a:p>
         </p:txBody>
@@ -5650,7 +5086,7 @@
                 <a:ea typeface="Arial"/>
                 <a:cs typeface="Arial"/>
               </a:rPr>
-              <a:t>00:00–01:30    Nikhil</a:t>
+              <a:t>Nikhil</a:t>
             </a:r>
           </a:p>
         </p:txBody>
@@ -6973,7 +6409,7 @@
                 <a:ea typeface="Arial"/>
                 <a:cs typeface="Arial"/>
               </a:rPr>
-              <a:t>14:30–16:00    Akshaya</a:t>
+              <a:t>Akshaya</a:t>
             </a:r>
           </a:p>
         </p:txBody>
@@ -7781,7 +7217,7 @@
                 <a:ea typeface="Arial"/>
                 <a:cs typeface="Arial"/>
               </a:rPr>
-              <a:t>Repository-recorded screenshot; provenance in notes.  Synthetic research only. No clinical validation claimed.</a:t>
+              <a:t>Recorded screenshot: synthetic subject P0095 (training split); provenance in notes.  Synthetic research only. No clinical validation claimed.</a:t>
             </a:r>
           </a:p>
         </p:txBody>
@@ -8122,7 +7558,7 @@
                 <a:ea typeface="Arial"/>
                 <a:cs typeface="Arial"/>
               </a:rPr>
-              <a:t>16:00–17:30    Nikhil</a:t>
+              <a:t>Nikhil</a:t>
             </a:r>
           </a:p>
         </p:txBody>
@@ -8299,8 +7735,8 @@
         </p:nvSpPr>
         <p:spPr>
           <a:xfrm xmlns:a="http://schemas.openxmlformats.org/drawingml/2006/main">
-            <a:off x="647700" y="2047875"/>
-            <a:ext cx="10763250" cy="638175"/>
+            <a:off x="649224" y="1828800"/>
+            <a:ext cx="10762488" cy="868680"/>
           </a:xfrm>
           <a:prstGeom xmlns:a="http://schemas.openxmlformats.org/drawingml/2006/main" prst="rect">
             <a:avLst/>
@@ -8311,7 +7747,7 @@
           </a:ln>
         </p:spPr>
         <p:txBody>
-          <a:bodyPr xmlns:a="http://schemas.openxmlformats.org/drawingml/2006/main" lIns="0" tIns="0" rIns="0" bIns="0"/>
+          <a:bodyPr xmlns:a="http://schemas.openxmlformats.org/drawingml/2006/main" lIns="0" tIns="0" rIns="0" bIns="0" wrap="square"/>
           <a:lstStyle xmlns:a="http://schemas.openxmlformats.org/drawingml/2006/main">
             <a:defPPr>
               <a:defRPr sz="2325" b="1">
@@ -8426,15 +7862,13 @@
               </a:defRPr>
             </a:pPr>
             <a:r>
-              <a:rPr sz="2325" b="1">
-                <a:solidFill>
-                  <a:srgbClr val="183C42"/>
-                </a:solidFill>
-                <a:latin typeface="Arial"/>
-                <a:ea typeface="Arial"/>
-                <a:cs typeface="Arial"/>
+              <a:rPr sz="2200" b="1">
+                <a:solidFill>
+                  <a:srgbClr val="183C42"/>
+                </a:solidFill>
+                <a:latin typeface="Arial"/>
               </a:rPr>
-              <a:t>Recorded synthetic validation, not reproduced here</a:t>
+              <a:t>Synthetic validation split (44 patients), also used for checkpoint selection and calibration: development evidence, not a held-out test</a:t>
             </a:r>
           </a:p>
         </p:txBody>
@@ -8455,8 +7889,8 @@
         </p:nvSpPr>
         <p:spPr>
           <a:xfrm xmlns:a="http://schemas.openxmlformats.org/drawingml/2006/main">
-            <a:off x="647700" y="2800350"/>
-            <a:ext cx="10763250" cy="638175"/>
+            <a:off x="649224" y="2788920"/>
+            <a:ext cx="10762488" cy="457200"/>
           </a:xfrm>
           <a:prstGeom xmlns:a="http://schemas.openxmlformats.org/drawingml/2006/main" prst="rect">
             <a:avLst/>
@@ -8467,7 +7901,7 @@
           </a:ln>
         </p:spPr>
         <p:txBody>
-          <a:bodyPr xmlns:a="http://schemas.openxmlformats.org/drawingml/2006/main" lIns="0" tIns="0" rIns="0" bIns="0"/>
+          <a:bodyPr xmlns:a="http://schemas.openxmlformats.org/drawingml/2006/main" lIns="0" tIns="0" rIns="0" bIns="0" wrap="square"/>
           <a:lstStyle xmlns:a="http://schemas.openxmlformats.org/drawingml/2006/main">
             <a:defPPr>
               <a:defRPr sz="2325" b="0">
@@ -8582,15 +8016,76 @@
               </a:defRPr>
             </a:pPr>
             <a:r>
-              <a:rPr sz="2325" b="0">
-                <a:solidFill>
-                  <a:srgbClr val="183C42"/>
-                </a:solidFill>
-                <a:latin typeface="Arial"/>
-                <a:ea typeface="Arial"/>
-                <a:cs typeface="Arial"/>
+              <a:rPr sz="2200" b="1">
+                <a:solidFill>
+                  <a:srgbClr val="183C42"/>
+                </a:solidFill>
+                <a:latin typeface="Arial"/>
               </a:rPr>
-              <a:t>30 / 60 / 120 min RMSE: 12.36 / 19.53 / 25.03 mg/dL</a:t>
+              <a:t>60-min RMSE:  </a:t>
+            </a:r>
+            <a:r>
+              <a:rPr sz="2200" b="0">
+                <a:solidFill>
+                  <a:srgbClr val="183C42"/>
+                </a:solidFill>
+                <a:latin typeface="Arial"/>
+              </a:rPr>
+              <a:t>hybrid </a:t>
+            </a:r>
+            <a:r>
+              <a:rPr sz="2200" b="1">
+                <a:solidFill>
+                  <a:srgbClr val="183C42"/>
+                </a:solidFill>
+                <a:latin typeface="Arial"/>
+              </a:rPr>
+              <a:t>19.53</a:t>
+            </a:r>
+            <a:r>
+              <a:rPr sz="2200" b="0">
+                <a:solidFill>
+                  <a:srgbClr val="183C42"/>
+                </a:solidFill>
+                <a:latin typeface="Arial"/>
+              </a:rPr>
+              <a:t>  ·  twin only </a:t>
+            </a:r>
+            <a:r>
+              <a:rPr sz="2200" b="1">
+                <a:solidFill>
+                  <a:srgbClr val="183C42"/>
+                </a:solidFill>
+                <a:latin typeface="Arial"/>
+              </a:rPr>
+              <a:t>23.23</a:t>
+            </a:r>
+            <a:r>
+              <a:rPr sz="2200" b="0">
+                <a:solidFill>
+                  <a:srgbClr val="183C42"/>
+                </a:solidFill>
+                <a:latin typeface="Arial"/>
+              </a:rPr>
+              <a:t>  ·  persistence </a:t>
+            </a:r>
+            <a:r>
+              <a:rPr sz="2200" b="1">
+                <a:solidFill>
+                  <a:srgbClr val="183C42"/>
+                </a:solidFill>
+                <a:latin typeface="Arial"/>
+              </a:rPr>
+              <a:t>36.05</a:t>
+            </a:r>
+            <a:r>
+              <a:rPr sz="2200" b="0">
+                <a:solidFill>
+                  <a:srgbClr val="183C42"/>
+                </a:solidFill>
+                <a:latin typeface="Arial"/>
+              </a:rPr>
+              <a:t> mg/dL</a:t>
             </a:r>
           </a:p>
         </p:txBody>
@@ -8611,8 +8106,8 @@
         </p:nvSpPr>
         <p:spPr>
           <a:xfrm xmlns:a="http://schemas.openxmlformats.org/drawingml/2006/main">
-            <a:off x="647700" y="3552825"/>
-            <a:ext cx="10763250" cy="638175"/>
+            <a:off x="649224" y="3310128"/>
+            <a:ext cx="10762488" cy="457200"/>
           </a:xfrm>
           <a:prstGeom xmlns:a="http://schemas.openxmlformats.org/drawingml/2006/main" prst="rect">
             <a:avLst/>
@@ -8623,7 +8118,7 @@
           </a:ln>
         </p:spPr>
         <p:txBody>
-          <a:bodyPr xmlns:a="http://schemas.openxmlformats.org/drawingml/2006/main" lIns="0" tIns="0" rIns="0" bIns="0"/>
+          <a:bodyPr xmlns:a="http://schemas.openxmlformats.org/drawingml/2006/main" lIns="0" tIns="0" rIns="0" bIns="0" wrap="square"/>
           <a:lstStyle xmlns:a="http://schemas.openxmlformats.org/drawingml/2006/main">
             <a:defPPr>
               <a:defRPr sz="2325" b="0">
@@ -8738,15 +8233,22 @@
               </a:defRPr>
             </a:pPr>
             <a:r>
-              <a:rPr sz="2325" b="0">
-                <a:solidFill>
-                  <a:srgbClr val="183C42"/>
-                </a:solidFill>
-                <a:latin typeface="Arial"/>
-                <a:ea typeface="Arial"/>
-                <a:cs typeface="Arial"/>
+              <a:rPr sz="2200" b="1">
+                <a:solidFill>
+                  <a:srgbClr val="183C42"/>
+                </a:solidFill>
+                <a:latin typeface="Arial"/>
               </a:rPr>
-              <a:t>80% interval coverage: 80.00%</a:t>
+              <a:t>Hybrid RMSE at 30 / 60 / 120 min:  </a:t>
+            </a:r>
+            <a:r>
+              <a:rPr sz="2200" b="0">
+                <a:solidFill>
+                  <a:srgbClr val="183C42"/>
+                </a:solidFill>
+                <a:latin typeface="Arial"/>
+              </a:rPr>
+              <a:t>12.36 / 19.53 / 25.03 mg/dL</a:t>
             </a:r>
           </a:p>
         </p:txBody>
@@ -8767,8 +8269,8 @@
         </p:nvSpPr>
         <p:spPr>
           <a:xfrm xmlns:a="http://schemas.openxmlformats.org/drawingml/2006/main">
-            <a:off x="647700" y="4305300"/>
-            <a:ext cx="10763250" cy="638175"/>
+            <a:off x="649224" y="3831336"/>
+            <a:ext cx="10762488" cy="457200"/>
           </a:xfrm>
           <a:prstGeom xmlns:a="http://schemas.openxmlformats.org/drawingml/2006/main" prst="rect">
             <a:avLst/>
@@ -8779,7 +8281,7 @@
           </a:ln>
         </p:spPr>
         <p:txBody>
-          <a:bodyPr xmlns:a="http://schemas.openxmlformats.org/drawingml/2006/main" lIns="0" tIns="0" rIns="0" bIns="0"/>
+          <a:bodyPr xmlns:a="http://schemas.openxmlformats.org/drawingml/2006/main" lIns="0" tIns="0" rIns="0" bIns="0" wrap="square"/>
           <a:lstStyle xmlns:a="http://schemas.openxmlformats.org/drawingml/2006/main">
             <a:defPPr>
               <a:defRPr sz="2325" b="0">
@@ -8894,171 +8396,22 @@
               </a:defRPr>
             </a:pPr>
             <a:r>
-              <a:rPr sz="2325" b="0">
-                <a:solidFill>
-                  <a:srgbClr val="183C42"/>
-                </a:solidFill>
-                <a:latin typeface="Arial"/>
-                <a:ea typeface="Arial"/>
-                <a:cs typeface="Arial"/>
+              <a:rPr sz="2200" b="1">
+                <a:solidFill>
+                  <a:srgbClr val="183C42"/>
+                </a:solidFill>
+                <a:latin typeface="Arial"/>
               </a:rPr>
-              <a:t>Interval width: 37.30 mg/dL</a:t>
-            </a:r>
-          </a:p>
-        </p:txBody>
-      </p:sp>
-      <p:sp>
-        <p:nvSpPr>
-          <p:cNvPr id="7" name="">
-            <a:extLst xmlns:a="http://schemas.openxmlformats.org/drawingml/2006/main">
-              <a:ext uri="{FF2B5EF4-FFF2-40B4-BE49-F238E27FC236}">
-                <a16:creationId xmlns:a16="http://schemas.microsoft.com/office/drawing/2014/main" id="{D9BA6991-8A3C-4A99-A01A-7427BB3D12D3}"/>
-              </a:ext>
-            </a:extLst>
-          </p:cNvPr>
-          <p:cNvSpPr>
-            <a:spLocks xmlns:a="http://schemas.openxmlformats.org/drawingml/2006/main" noGrp="1"/>
-          </p:cNvSpPr>
-          <p:nvPr/>
-        </p:nvSpPr>
-        <p:spPr>
-          <a:xfrm xmlns:a="http://schemas.openxmlformats.org/drawingml/2006/main">
-            <a:off x="647700" y="5057775"/>
-            <a:ext cx="10763250" cy="638175"/>
-          </a:xfrm>
-          <a:prstGeom xmlns:a="http://schemas.openxmlformats.org/drawingml/2006/main" prst="rect">
-            <a:avLst/>
-          </a:prstGeom>
-          <a:noFill xmlns:a="http://schemas.openxmlformats.org/drawingml/2006/main"/>
-          <a:ln xmlns:a="http://schemas.openxmlformats.org/drawingml/2006/main" w="0">
-            <a:noFill/>
-          </a:ln>
-        </p:spPr>
-        <p:txBody>
-          <a:bodyPr xmlns:a="http://schemas.openxmlformats.org/drawingml/2006/main" lIns="0" tIns="0" rIns="0" bIns="0"/>
-          <a:lstStyle xmlns:a="http://schemas.openxmlformats.org/drawingml/2006/main">
-            <a:defPPr>
-              <a:defRPr sz="2325" b="0">
-                <a:solidFill>
-                  <a:srgbClr val="183C42"/>
-                </a:solidFill>
-                <a:latin typeface="Arial"/>
-                <a:ea typeface="Arial"/>
-                <a:cs typeface="Arial"/>
-              </a:defRPr>
-            </a:defPPr>
-            <a:lvl1pPr>
-              <a:defRPr sz="2325" b="0">
-                <a:solidFill>
-                  <a:srgbClr val="183C42"/>
-                </a:solidFill>
-                <a:latin typeface="Arial"/>
-                <a:ea typeface="Arial"/>
-                <a:cs typeface="Arial"/>
-              </a:defRPr>
-            </a:lvl1pPr>
-            <a:lvl2pPr>
-              <a:defRPr sz="2325" b="0">
-                <a:solidFill>
-                  <a:srgbClr val="183C42"/>
-                </a:solidFill>
-                <a:latin typeface="Arial"/>
-                <a:ea typeface="Arial"/>
-                <a:cs typeface="Arial"/>
-              </a:defRPr>
-            </a:lvl2pPr>
-            <a:lvl3pPr>
-              <a:defRPr sz="2325" b="0">
-                <a:solidFill>
-                  <a:srgbClr val="183C42"/>
-                </a:solidFill>
-                <a:latin typeface="Arial"/>
-                <a:ea typeface="Arial"/>
-                <a:cs typeface="Arial"/>
-              </a:defRPr>
-            </a:lvl3pPr>
-            <a:lvl4pPr>
-              <a:defRPr sz="2325" b="0">
-                <a:solidFill>
-                  <a:srgbClr val="183C42"/>
-                </a:solidFill>
-                <a:latin typeface="Arial"/>
-                <a:ea typeface="Arial"/>
-                <a:cs typeface="Arial"/>
-              </a:defRPr>
-            </a:lvl4pPr>
-            <a:lvl5pPr>
-              <a:defRPr sz="2325" b="0">
-                <a:solidFill>
-                  <a:srgbClr val="183C42"/>
-                </a:solidFill>
-                <a:latin typeface="Arial"/>
-                <a:ea typeface="Arial"/>
-                <a:cs typeface="Arial"/>
-              </a:defRPr>
-            </a:lvl5pPr>
-            <a:lvl6pPr>
-              <a:defRPr sz="2325" b="0">
-                <a:solidFill>
-                  <a:srgbClr val="183C42"/>
-                </a:solidFill>
-                <a:latin typeface="Arial"/>
-                <a:ea typeface="Arial"/>
-                <a:cs typeface="Arial"/>
-              </a:defRPr>
-            </a:lvl6pPr>
-            <a:lvl7pPr>
-              <a:defRPr sz="2325" b="0">
-                <a:solidFill>
-                  <a:srgbClr val="183C42"/>
-                </a:solidFill>
-                <a:latin typeface="Arial"/>
-                <a:ea typeface="Arial"/>
-                <a:cs typeface="Arial"/>
-              </a:defRPr>
-            </a:lvl7pPr>
-            <a:lvl8pPr>
-              <a:defRPr sz="2325" b="0">
-                <a:solidFill>
-                  <a:srgbClr val="183C42"/>
-                </a:solidFill>
-                <a:latin typeface="Arial"/>
-                <a:ea typeface="Arial"/>
-                <a:cs typeface="Arial"/>
-              </a:defRPr>
-            </a:lvl8pPr>
-            <a:lvl9pPr>
-              <a:defRPr sz="2325" b="0">
-                <a:solidFill>
-                  <a:srgbClr val="183C42"/>
-                </a:solidFill>
-                <a:latin typeface="Arial"/>
-                <a:ea typeface="Arial"/>
-                <a:cs typeface="Arial"/>
-              </a:defRPr>
-            </a:lvl9pPr>
-          </a:lstStyle>
-          <a:p xmlns:a="http://schemas.openxmlformats.org/drawingml/2006/main">
-            <a:pPr>
-              <a:defRPr sz="2325" b="0">
-                <a:solidFill>
-                  <a:srgbClr val="183C42"/>
-                </a:solidFill>
-                <a:latin typeface="Arial"/>
-                <a:ea typeface="Arial"/>
-                <a:cs typeface="Arial"/>
-              </a:defRPr>
-            </a:pPr>
-            <a:r>
-              <a:rPr sz="2325" b="0">
-                <a:solidFill>
-                  <a:srgbClr val="183C42"/>
-                </a:solidFill>
-                <a:latin typeface="Arial"/>
-                <a:ea typeface="Arial"/>
-                <a:cs typeface="Arial"/>
+              <a:t>Spike-risk AUROC (raw model output):  </a:t>
+            </a:r>
+            <a:r>
+              <a:rPr sz="2200" b="0">
+                <a:solidFill>
+                  <a:srgbClr val="183C42"/>
+                </a:solidFill>
+                <a:latin typeface="Arial"/>
               </a:rPr>
-              <a:t>Hazard AUROC: 0.923; Brier: 0.0703</a:t>
+              <a:t>0.922</a:t>
             </a:r>
           </a:p>
         </p:txBody>
@@ -9371,6 +8724,73 @@
                 <a:cs typeface="Arial"/>
               </a:rPr>
               <a:t>11</a:t>
+            </a:r>
+          </a:p>
+        </p:txBody>
+      </p:sp>
+      <p:sp xmlns:a="http://schemas.openxmlformats.org/drawingml/2006/main">
+        <p:nvSpPr>
+          <p:cNvPr id="11" name="Rectangle 10"/>
+          <p:cNvSpPr/>
+          <p:nvPr/>
+        </p:nvSpPr>
+        <p:spPr>
+          <a:xfrm>
+            <a:off x="649224" y="4434840"/>
+            <a:ext cx="10058400" cy="1280160"/>
+          </a:xfrm>
+          <a:prstGeom prst="rect">
+            <a:avLst/>
+          </a:prstGeom>
+          <a:solidFill>
+            <a:srgbClr val="F3E3C8"/>
+          </a:solidFill>
+          <a:ln w="19050">
+            <a:solidFill>
+              <a:srgbClr val="B5701E"/>
+            </a:solidFill>
+          </a:ln>
+          <a:effectLst/>
+        </p:spPr>
+        <p:style>
+          <a:lnRef idx="1">
+            <a:schemeClr val="accent1"/>
+          </a:lnRef>
+          <a:fillRef idx="3">
+            <a:schemeClr val="accent1"/>
+          </a:fillRef>
+          <a:effectRef idx="2">
+            <a:schemeClr val="accent1"/>
+          </a:effectRef>
+          <a:fontRef idx="minor">
+            <a:schemeClr val="lt1"/>
+          </a:fontRef>
+        </p:style>
+        <p:txBody>
+          <a:bodyPr rtlCol="0" anchor="ctr" lIns="228600" rIns="228600" tIns="109728" bIns="109728" wrap="square"/>
+          <a:lstStyle/>
+          <a:p>
+            <a:pPr algn="l"/>
+            <a:r>
+              <a:rPr sz="2000" b="1">
+                <a:solidFill>
+                  <a:srgbClr val="183C42"/>
+                </a:solidFill>
+                <a:latin typeface="Arial"/>
+              </a:rPr>
+              <a:t>In-sample diagnostics: fitted and scored on these same validation patients</a:t>
+            </a:r>
+          </a:p>
+          <a:p>
+            <a:pPr algn="l"/>
+            <a:r>
+              <a:rPr sz="1900" b="0">
+                <a:solidFill>
+                  <a:srgbClr val="183C42"/>
+                </a:solidFill>
+                <a:latin typeface="Arial"/>
+              </a:rPr>
+              <a:t>80% interval coverage 80.00% (expected by construction) · width 37.30 mg/dL · calibrated Brier 0.0703. Not independent performance evidence.</a:t>
             </a:r>
           </a:p>
         </p:txBody>
@@ -9555,7 +8975,7 @@
                 <a:ea typeface="Arial"/>
                 <a:cs typeface="Arial"/>
               </a:rPr>
-              <a:t>17:30–19:00    Akshaya</a:t>
+              <a:t>Akshaya</a:t>
             </a:r>
           </a:p>
         </p:txBody>
@@ -10056,7 +9476,7 @@
           </a:ln>
         </p:spPr>
         <p:txBody>
-          <a:bodyPr xmlns:a="http://schemas.openxmlformats.org/drawingml/2006/main" lIns="0" tIns="0" rIns="0" bIns="0"/>
+          <a:bodyPr xmlns:a="http://schemas.openxmlformats.org/drawingml/2006/main" lIns="0" tIns="0" rIns="0" bIns="0" wrap="square"/>
           <a:lstStyle xmlns:a="http://schemas.openxmlformats.org/drawingml/2006/main">
             <a:defPPr>
               <a:defRPr sz="2250" b="0">
@@ -10171,38 +9591,42 @@
               </a:defRPr>
             </a:pPr>
             <a:r>
-              <a:rPr sz="2250" b="0">
+              <a:rPr sz="2100" b="0">
                 <a:solidFill>
                   <a:srgbClr val="ABD4CA"/>
                 </a:solidFill>
                 <a:latin typeface="Arial"/>
-                <a:ea typeface="Arial"/>
-                <a:cs typeface="Arial"/>
               </a:rPr>
               <a:t>Mock-real comparator</a:t>
             </a:r>
           </a:p>
           <a:p xmlns:a="http://schemas.openxmlformats.org/drawingml/2006/main">
-            <a:pPr>
-              <a:defRPr sz="2250" b="0">
+            <a:r>
+              <a:rPr sz="2100" b="0">
                 <a:solidFill>
                   <a:srgbClr val="ABD4CA"/>
                 </a:solidFill>
                 <a:latin typeface="Arial"/>
-                <a:ea typeface="Arial"/>
-                <a:cs typeface="Arial"/>
-              </a:defRPr>
-            </a:pPr>
-            <a:r>
-              <a:rPr sz="2250" b="0">
+              </a:rPr>
+              <a:t>AUROC </a:t>
+            </a:r>
+            <a:r>
+              <a:rPr sz="2100" b="1">
                 <a:solidFill>
                   <a:srgbClr val="ABD4CA"/>
                 </a:solidFill>
                 <a:latin typeface="Arial"/>
-                <a:ea typeface="Arial"/>
-                <a:cs typeface="Arial"/>
               </a:rPr>
-              <a:t>AUROC 0.932</a:t>
+              <a:t>0.932</a:t>
+            </a:r>
+            <a:r>
+              <a:rPr sz="2100" b="0">
+                <a:solidFill>
+                  <a:srgbClr val="ABD4CA"/>
+                </a:solidFill>
+                <a:latin typeface="Arial"/>
+              </a:rPr>
+              <a:t> (acceptance target ≤ 0.65)</a:t>
             </a:r>
           </a:p>
         </p:txBody>
@@ -10223,19 +9647,23 @@
         </p:nvSpPr>
         <p:spPr>
           <a:xfrm xmlns:a="http://schemas.openxmlformats.org/drawingml/2006/main">
-            <a:off x="6429375" y="2286000"/>
-            <a:ext cx="4857750" cy="2571750"/>
+            <a:off x="6428232" y="2194560"/>
+            <a:ext cx="5120640" cy="2743200"/>
           </a:xfrm>
           <a:prstGeom xmlns:a="http://schemas.openxmlformats.org/drawingml/2006/main" prst="rect">
             <a:avLst/>
           </a:prstGeom>
-          <a:noFill xmlns:a="http://schemas.openxmlformats.org/drawingml/2006/main"/>
-          <a:ln xmlns:a="http://schemas.openxmlformats.org/drawingml/2006/main" w="0">
-            <a:noFill/>
+          <a:solidFill xmlns:a="http://schemas.openxmlformats.org/drawingml/2006/main">
+            <a:srgbClr val="0E2E33"/>
+          </a:solidFill>
+          <a:ln xmlns:a="http://schemas.openxmlformats.org/drawingml/2006/main" w="19050">
+            <a:solidFill>
+              <a:srgbClr val="FFD0A8"/>
+            </a:solidFill>
           </a:ln>
         </p:spPr>
         <p:txBody>
-          <a:bodyPr xmlns:a="http://schemas.openxmlformats.org/drawingml/2006/main" lIns="0" tIns="0" rIns="0" bIns="0"/>
+          <a:bodyPr xmlns:a="http://schemas.openxmlformats.org/drawingml/2006/main" lIns="274320" tIns="182880" rIns="274320" bIns="182880" anchor="ctr" wrap="square"/>
           <a:lstStyle xmlns:a="http://schemas.openxmlformats.org/drawingml/2006/main">
             <a:defPPr>
               <a:defRPr sz="2700" b="0">
@@ -10350,43 +9778,29 @@
               </a:defRPr>
             </a:pPr>
             <a:r>
-              <a:rPr sz="2700" b="0">
+              <a:rPr sz="2200" b="1">
                 <a:solidFill>
                   <a:srgbClr val="F5F3EC"/>
                 </a:solidFill>
                 <a:latin typeface="Arial"/>
-                <a:ea typeface="Arial"/>
-                <a:cs typeface="Arial"/>
               </a:rPr>
-              <a:t>External EW-01 remains unexecuted</a:t>
-            </a:r>
-          </a:p>
-          <a:p xmlns:a="http://schemas.openxmlformats.org/drawingml/2006/main">
-            <a:r>
-              <a:t/>
+              <a:t>EW-01 study protocol remains unexecuted</a:t>
             </a:r>
           </a:p>
           <a:p xmlns:a="http://schemas.openxmlformats.org/drawingml/2006/main">
             <a:pPr>
-              <a:defRPr sz="2700" b="0">
-                <a:solidFill>
-                  <a:srgbClr val="F5F3EC"/>
-                </a:solidFill>
-                <a:latin typeface="Arial"/>
-                <a:ea typeface="Arial"/>
-                <a:cs typeface="Arial"/>
-              </a:defRPr>
+              <a:spcBef>
+                <a:spcPts val="800"/>
+              </a:spcBef>
             </a:pPr>
             <a:r>
-              <a:rPr sz="2700" b="0">
-                <a:solidFill>
-                  <a:srgbClr val="F5F3EC"/>
-                </a:solidFill>
-                <a:latin typeface="Arial"/>
-                <a:ea typeface="Arial"/>
-                <a:cs typeface="Arial"/>
+              <a:rPr sz="1800" b="0">
+                <a:solidFill>
+                  <a:srgbClr val="ABD4CA"/>
+                </a:solidFill>
+                <a:latin typeface="Arial"/>
               </a:rPr>
-              <a:t>Clinical efficacy is unestablished</a:t>
+              <a:t>Clinical efficacy is unestablished. Protocol amendments remain pending co-author sign-offs; no human efficacy or cross-center transfer is claimed.</a:t>
             </a:r>
           </a:p>
         </p:txBody>
@@ -10883,7 +10297,7 @@
                 <a:ea typeface="Arial"/>
                 <a:cs typeface="Arial"/>
               </a:rPr>
-              <a:t>19:00–20:30    Nikhil</a:t>
+              <a:t>Nikhil</a:t>
             </a:r>
           </a:p>
         </p:txBody>
@@ -11691,7 +11105,7 @@
                 <a:ea typeface="Arial"/>
                 <a:cs typeface="Arial"/>
               </a:rPr>
-              <a:t>Repository-recorded screenshot; provenance in notes.  Synthetic research only. No clinical validation claimed.</a:t>
+              <a:t>Recorded Evidence-page screenshot from an earlier build; provenance in notes.  Synthetic research only. No clinical validation claimed.</a:t>
             </a:r>
           </a:p>
         </p:txBody>
@@ -12032,7 +11446,7 @@
                 <a:ea typeface="Arial"/>
                 <a:cs typeface="Arial"/>
               </a:rPr>
-              <a:t>20:30–21:30    Akshaya + Nikhil</a:t>
+              <a:t>Akshaya + Nikhil</a:t>
             </a:r>
           </a:p>
         </p:txBody>
@@ -12209,8 +11623,8 @@
         </p:nvSpPr>
         <p:spPr>
           <a:xfrm xmlns:a="http://schemas.openxmlformats.org/drawingml/2006/main">
-            <a:off x="647700" y="2047875"/>
-            <a:ext cx="10763250" cy="885825"/>
+            <a:off x="649224" y="1874519"/>
+            <a:ext cx="10762488" cy="548640"/>
           </a:xfrm>
           <a:prstGeom xmlns:a="http://schemas.openxmlformats.org/drawingml/2006/main" prst="rect">
             <a:avLst/>
@@ -12221,7 +11635,7 @@
           </a:ln>
         </p:spPr>
         <p:txBody>
-          <a:bodyPr xmlns:a="http://schemas.openxmlformats.org/drawingml/2006/main" lIns="0" tIns="0" rIns="0" bIns="0"/>
+          <a:bodyPr xmlns:a="http://schemas.openxmlformats.org/drawingml/2006/main" lIns="0" tIns="0" rIns="0" bIns="0" wrap="square"/>
           <a:lstStyle xmlns:a="http://schemas.openxmlformats.org/drawingml/2006/main">
             <a:defPPr>
               <a:defRPr sz="2625" b="1">
@@ -12336,15 +11750,13 @@
               </a:defRPr>
             </a:pPr>
             <a:r>
-              <a:rPr sz="2625" b="1">
+              <a:rPr sz="2400" b="1">
                 <a:solidFill>
                   <a:srgbClr val="F5F3EC"/>
                 </a:solidFill>
                 <a:latin typeface="Arial"/>
-                <a:ea typeface="Arial"/>
-                <a:cs typeface="Arial"/>
               </a:rPr>
-              <a:t>An inspectable synthetic forecasting workflow</a:t>
+              <a:t>An inspectable forecasting workflow, with its evidence limits stated</a:t>
             </a:r>
           </a:p>
         </p:txBody>
@@ -12365,19 +11777,23 @@
         </p:nvSpPr>
         <p:spPr>
           <a:xfrm xmlns:a="http://schemas.openxmlformats.org/drawingml/2006/main">
-            <a:off x="647700" y="3048000"/>
-            <a:ext cx="10763250" cy="885825"/>
+            <a:off x="649224" y="2560320"/>
+            <a:ext cx="10058400" cy="2514600"/>
           </a:xfrm>
           <a:prstGeom xmlns:a="http://schemas.openxmlformats.org/drawingml/2006/main" prst="rect">
             <a:avLst/>
           </a:prstGeom>
-          <a:noFill xmlns:a="http://schemas.openxmlformats.org/drawingml/2006/main"/>
-          <a:ln xmlns:a="http://schemas.openxmlformats.org/drawingml/2006/main" w="0">
-            <a:noFill/>
+          <a:solidFill xmlns:a="http://schemas.openxmlformats.org/drawingml/2006/main">
+            <a:srgbClr val="0E2E33"/>
+          </a:solidFill>
+          <a:ln xmlns:a="http://schemas.openxmlformats.org/drawingml/2006/main" w="19050">
+            <a:solidFill>
+              <a:srgbClr val="FFD0A8"/>
+            </a:solidFill>
           </a:ln>
         </p:spPr>
         <p:txBody>
-          <a:bodyPr xmlns:a="http://schemas.openxmlformats.org/drawingml/2006/main" lIns="0" tIns="0" rIns="0" bIns="0"/>
+          <a:bodyPr xmlns:a="http://schemas.openxmlformats.org/drawingml/2006/main" lIns="274320" tIns="137160" rIns="274320" bIns="137160" anchor="ctr" wrap="square"/>
           <a:lstStyle xmlns:a="http://schemas.openxmlformats.org/drawingml/2006/main">
             <a:defPPr>
               <a:defRPr sz="2625" b="0">
@@ -12492,15 +11908,97 @@
               </a:defRPr>
             </a:pPr>
             <a:r>
-              <a:rPr sz="2625" b="0">
+              <a:rPr sz="1800" b="1">
+                <a:solidFill>
+                  <a:srgbClr val="FFD0A8"/>
+                </a:solidFill>
+                <a:latin typeface="Arial"/>
+              </a:rPr>
+              <a:t>Locked real-patient test (11 patients): </a:t>
+            </a:r>
+            <a:r>
+              <a:rPr sz="1800" b="0">
                 <a:solidFill>
                   <a:srgbClr val="F5F3EC"/>
                 </a:solidFill>
                 <a:latin typeface="Arial"/>
-                <a:ea typeface="Arial"/>
-                <a:cs typeface="Arial"/>
               </a:rPr>
-              <a:t>Next: engineering verification and external validation</a:t>
+              <a:t>only 6.9% of spikes warned ≥30 min ahead (95% CI 0.0–13.9; full-test point estimate, bootstrap mean 6.0%)</a:t>
+            </a:r>
+          </a:p>
+          <a:p xmlns:a="http://schemas.openxmlformats.org/drawingml/2006/main">
+            <a:pPr>
+              <a:spcBef>
+                <a:spcPts val="700"/>
+              </a:spcBef>
+            </a:pPr>
+            <a:r>
+              <a:rPr sz="1800" b="1">
+                <a:solidFill>
+                  <a:srgbClr val="FFD0A8"/>
+                </a:solidFill>
+                <a:latin typeface="Arial"/>
+              </a:rPr>
+              <a:t>Two preregistered external checks </a:t>
+            </a:r>
+            <a:r>
+              <a:rPr sz="1800" b="0">
+                <a:solidFill>
+                  <a:srgbClr val="F5F3EC"/>
+                </a:solidFill>
+                <a:latin typeface="Arial"/>
+              </a:rPr>
+              <a:t>(Hall 2018; AZT1D): prespecified early-warning improvement not confirmed</a:t>
+            </a:r>
+          </a:p>
+          <a:p xmlns:a="http://schemas.openxmlformats.org/drawingml/2006/main">
+            <a:pPr>
+              <a:spcBef>
+                <a:spcPts val="700"/>
+              </a:spcBef>
+            </a:pPr>
+            <a:r>
+              <a:rPr sz="1800" b="1">
+                <a:solidFill>
+                  <a:srgbClr val="FFD0A8"/>
+                </a:solidFill>
+                <a:latin typeface="Arial"/>
+              </a:rPr>
+              <a:t>Candidate C2: </a:t>
+            </a:r>
+            <a:r>
+              <a:rPr sz="1800" b="0">
+                <a:solidFill>
+                  <a:srgbClr val="F5F3EC"/>
+                </a:solidFill>
+                <a:latin typeface="Arial"/>
+              </a:rPr>
+              <a:t>exploratory, not established (+4.5 points, 95% CI −2.5 to +12.8)</a:t>
+            </a:r>
+          </a:p>
+          <a:p xmlns:a="http://schemas.openxmlformats.org/drawingml/2006/main">
+            <a:pPr>
+              <a:spcBef>
+                <a:spcPts val="700"/>
+              </a:spcBef>
+            </a:pPr>
+            <a:r>
+              <a:rPr sz="1800" b="1">
+                <a:solidFill>
+                  <a:srgbClr val="FFD0A8"/>
+                </a:solidFill>
+                <a:latin typeface="Arial"/>
+              </a:rPr>
+              <a:t>Next: </a:t>
+            </a:r>
+            <a:r>
+              <a:rPr sz="1800" b="0">
+                <a:solidFill>
+                  <a:srgbClr val="F5F3EC"/>
+                </a:solidFill>
+                <a:latin typeface="Arial"/>
+              </a:rPr>
+              <a:t>AI-READI confirmation. Protocol frozen; not yet run, data access pending</a:t>
             </a:r>
           </a:p>
         </p:txBody>
@@ -12521,8 +12019,8 @@
         </p:nvSpPr>
         <p:spPr>
           <a:xfrm xmlns:a="http://schemas.openxmlformats.org/drawingml/2006/main">
-            <a:off x="647700" y="4048125"/>
-            <a:ext cx="10763250" cy="885825"/>
+            <a:off x="649224" y="5257800"/>
+            <a:ext cx="10762488" cy="502920"/>
           </a:xfrm>
           <a:prstGeom xmlns:a="http://schemas.openxmlformats.org/drawingml/2006/main" prst="rect">
             <a:avLst/>
@@ -12533,7 +12031,7 @@
           </a:ln>
         </p:spPr>
         <p:txBody>
-          <a:bodyPr xmlns:a="http://schemas.openxmlformats.org/drawingml/2006/main" lIns="0" tIns="0" rIns="0" bIns="0"/>
+          <a:bodyPr xmlns:a="http://schemas.openxmlformats.org/drawingml/2006/main" lIns="0" tIns="0" rIns="0" bIns="0" wrap="square"/>
           <a:lstStyle xmlns:a="http://schemas.openxmlformats.org/drawingml/2006/main">
             <a:defPPr>
               <a:defRPr sz="2625" b="0">
@@ -12648,169 +12146,20 @@
               </a:defRPr>
             </a:pPr>
             <a:r>
-              <a:rPr sz="2625" b="0">
+              <a:rPr sz="2400" b="0">
+                <a:solidFill>
+                  <a:srgbClr val="ABD4CA"/>
+                </a:solidFill>
+                <a:latin typeface="Arial"/>
+              </a:rPr>
+              <a:t>Akshaya R and Nikhil VS  ·  </a:t>
+            </a:r>
+            <a:r>
+              <a:rPr sz="2400" b="1">
                 <a:solidFill>
                   <a:srgbClr val="F5F3EC"/>
                 </a:solidFill>
                 <a:latin typeface="Arial"/>
-                <a:ea typeface="Arial"/>
-                <a:cs typeface="Arial"/>
-              </a:rPr>
-              <a:t>Akshaya R and Nikhil VS</a:t>
-            </a:r>
-          </a:p>
-        </p:txBody>
-      </p:sp>
-      <p:sp>
-        <p:nvSpPr>
-          <p:cNvPr id="6" name="">
-            <a:extLst xmlns:a="http://schemas.openxmlformats.org/drawingml/2006/main">
-              <a:ext uri="{FF2B5EF4-FFF2-40B4-BE49-F238E27FC236}">
-                <a16:creationId xmlns:a16="http://schemas.microsoft.com/office/drawing/2014/main" id="{501B20D7-E254-4DA0-A4FF-9028EA204002}"/>
-              </a:ext>
-            </a:extLst>
-          </p:cNvPr>
-          <p:cNvSpPr>
-            <a:spLocks xmlns:a="http://schemas.openxmlformats.org/drawingml/2006/main" noGrp="1"/>
-          </p:cNvSpPr>
-          <p:nvPr/>
-        </p:nvSpPr>
-        <p:spPr>
-          <a:xfrm xmlns:a="http://schemas.openxmlformats.org/drawingml/2006/main">
-            <a:off x="647700" y="5048250"/>
-            <a:ext cx="10763250" cy="885825"/>
-          </a:xfrm>
-          <a:prstGeom xmlns:a="http://schemas.openxmlformats.org/drawingml/2006/main" prst="rect">
-            <a:avLst/>
-          </a:prstGeom>
-          <a:noFill xmlns:a="http://schemas.openxmlformats.org/drawingml/2006/main"/>
-          <a:ln xmlns:a="http://schemas.openxmlformats.org/drawingml/2006/main" w="0">
-            <a:noFill/>
-          </a:ln>
-        </p:spPr>
-        <p:txBody>
-          <a:bodyPr xmlns:a="http://schemas.openxmlformats.org/drawingml/2006/main" lIns="0" tIns="0" rIns="0" bIns="0"/>
-          <a:lstStyle xmlns:a="http://schemas.openxmlformats.org/drawingml/2006/main">
-            <a:defPPr>
-              <a:defRPr sz="2625" b="0">
-                <a:solidFill>
-                  <a:srgbClr val="F5F3EC"/>
-                </a:solidFill>
-                <a:latin typeface="Arial"/>
-                <a:ea typeface="Arial"/>
-                <a:cs typeface="Arial"/>
-              </a:defRPr>
-            </a:defPPr>
-            <a:lvl1pPr>
-              <a:defRPr sz="2625" b="0">
-                <a:solidFill>
-                  <a:srgbClr val="F5F3EC"/>
-                </a:solidFill>
-                <a:latin typeface="Arial"/>
-                <a:ea typeface="Arial"/>
-                <a:cs typeface="Arial"/>
-              </a:defRPr>
-            </a:lvl1pPr>
-            <a:lvl2pPr>
-              <a:defRPr sz="2625" b="0">
-                <a:solidFill>
-                  <a:srgbClr val="F5F3EC"/>
-                </a:solidFill>
-                <a:latin typeface="Arial"/>
-                <a:ea typeface="Arial"/>
-                <a:cs typeface="Arial"/>
-              </a:defRPr>
-            </a:lvl2pPr>
-            <a:lvl3pPr>
-              <a:defRPr sz="2625" b="0">
-                <a:solidFill>
-                  <a:srgbClr val="F5F3EC"/>
-                </a:solidFill>
-                <a:latin typeface="Arial"/>
-                <a:ea typeface="Arial"/>
-                <a:cs typeface="Arial"/>
-              </a:defRPr>
-            </a:lvl3pPr>
-            <a:lvl4pPr>
-              <a:defRPr sz="2625" b="0">
-                <a:solidFill>
-                  <a:srgbClr val="F5F3EC"/>
-                </a:solidFill>
-                <a:latin typeface="Arial"/>
-                <a:ea typeface="Arial"/>
-                <a:cs typeface="Arial"/>
-              </a:defRPr>
-            </a:lvl4pPr>
-            <a:lvl5pPr>
-              <a:defRPr sz="2625" b="0">
-                <a:solidFill>
-                  <a:srgbClr val="F5F3EC"/>
-                </a:solidFill>
-                <a:latin typeface="Arial"/>
-                <a:ea typeface="Arial"/>
-                <a:cs typeface="Arial"/>
-              </a:defRPr>
-            </a:lvl5pPr>
-            <a:lvl6pPr>
-              <a:defRPr sz="2625" b="0">
-                <a:solidFill>
-                  <a:srgbClr val="F5F3EC"/>
-                </a:solidFill>
-                <a:latin typeface="Arial"/>
-                <a:ea typeface="Arial"/>
-                <a:cs typeface="Arial"/>
-              </a:defRPr>
-            </a:lvl6pPr>
-            <a:lvl7pPr>
-              <a:defRPr sz="2625" b="0">
-                <a:solidFill>
-                  <a:srgbClr val="F5F3EC"/>
-                </a:solidFill>
-                <a:latin typeface="Arial"/>
-                <a:ea typeface="Arial"/>
-                <a:cs typeface="Arial"/>
-              </a:defRPr>
-            </a:lvl7pPr>
-            <a:lvl8pPr>
-              <a:defRPr sz="2625" b="0">
-                <a:solidFill>
-                  <a:srgbClr val="F5F3EC"/>
-                </a:solidFill>
-                <a:latin typeface="Arial"/>
-                <a:ea typeface="Arial"/>
-                <a:cs typeface="Arial"/>
-              </a:defRPr>
-            </a:lvl8pPr>
-            <a:lvl9pPr>
-              <a:defRPr sz="2625" b="0">
-                <a:solidFill>
-                  <a:srgbClr val="F5F3EC"/>
-                </a:solidFill>
-                <a:latin typeface="Arial"/>
-                <a:ea typeface="Arial"/>
-                <a:cs typeface="Arial"/>
-              </a:defRPr>
-            </a:lvl9pPr>
-          </a:lstStyle>
-          <a:p xmlns:a="http://schemas.openxmlformats.org/drawingml/2006/main">
-            <a:pPr>
-              <a:defRPr sz="2625" b="0">
-                <a:solidFill>
-                  <a:srgbClr val="F5F3EC"/>
-                </a:solidFill>
-                <a:latin typeface="Arial"/>
-                <a:ea typeface="Arial"/>
-                <a:cs typeface="Arial"/>
-              </a:defRPr>
-            </a:pPr>
-            <a:r>
-              <a:rPr sz="2625" b="0">
-                <a:solidFill>
-                  <a:srgbClr val="F5F3EC"/>
-                </a:solidFill>
-                <a:latin typeface="Arial"/>
-                <a:ea typeface="Arial"/>
-                <a:cs typeface="Arial"/>
               </a:rPr>
               <a:t>Thank you</a:t>
             </a:r>
@@ -12968,7 +12317,7 @@
                 <a:ea typeface="Arial"/>
                 <a:cs typeface="Arial"/>
               </a:rPr>
-              <a:t>Synthetic research only. No clinical validation claimed.</a:t>
+              <a:t>Research prototype, not a medical device. No clinical validation claimed.</a:t>
             </a:r>
           </a:p>
         </p:txBody>
@@ -13309,7 +12658,7 @@
                 <a:ea typeface="Arial"/>
                 <a:cs typeface="Arial"/>
               </a:rPr>
-              <a:t>01:30–03:00    Akshaya</a:t>
+              <a:t>Akshaya</a:t>
             </a:r>
           </a:p>
         </p:txBody>
@@ -14430,7 +13779,7 @@
                 <a:ea typeface="Arial"/>
                 <a:cs typeface="Arial"/>
               </a:rPr>
-              <a:t>03:00–04:30    Akshaya</a:t>
+              <a:t>Akshaya</a:t>
             </a:r>
           </a:p>
         </p:txBody>
@@ -15054,7 +14403,7 @@
                 <a:ea typeface="Arial"/>
                 <a:cs typeface="Arial"/>
               </a:rPr>
-              <a:t>Demonstration: training subject only</a:t>
+              <a:t>Demonstration: training-split subjects only</a:t>
             </a:r>
           </a:p>
         </p:txBody>
@@ -15707,7 +15056,7 @@
                 <a:ea typeface="Arial"/>
                 <a:cs typeface="Arial"/>
               </a:rPr>
-              <a:t>04:30–06:00    Nikhil</a:t>
+              <a:t>Nikhil</a:t>
             </a:r>
           </a:p>
         </p:txBody>
@@ -17140,7 +16489,7 @@
                 <a:ea typeface="Arial"/>
                 <a:cs typeface="Arial"/>
               </a:rPr>
-              <a:t>06:00–07:30    Akshaya</a:t>
+              <a:t>Akshaya</a:t>
             </a:r>
           </a:p>
         </p:txBody>
@@ -18417,7 +17766,7 @@
                 <a:ea typeface="Arial"/>
                 <a:cs typeface="Arial"/>
               </a:rPr>
-              <a:t>07:30–09:00    Nikhil</a:t>
+              <a:t>Nikhil</a:t>
             </a:r>
           </a:p>
         </p:txBody>
@@ -19225,7 +18574,7 @@
                 <a:ea typeface="Arial"/>
                 <a:cs typeface="Arial"/>
               </a:rPr>
-              <a:t>Repository-recorded screenshot; provenance in notes.  Synthetic research only. No clinical validation claimed.</a:t>
+              <a:t>Recorded screenshot: synthetic subject P0001 (training split); provenance in notes.  Synthetic research only. No clinical validation claimed.</a:t>
             </a:r>
           </a:p>
         </p:txBody>
@@ -19566,7 +18915,7 @@
                 <a:ea typeface="Arial"/>
                 <a:cs typeface="Arial"/>
               </a:rPr>
-              <a:t>09:00–11:30    Nikhil + Akshaya</a:t>
+              <a:t>Nikhil + Akshaya</a:t>
             </a:r>
           </a:p>
         </p:txBody>
@@ -20346,7 +19695,7 @@
                 <a:ea typeface="Arial"/>
                 <a:cs typeface="Arial"/>
               </a:rPr>
-              <a:t>Synthetic training subject P0003</a:t>
+              <a:t>Training-split subjects only; never the sealed test split</a:t>
             </a:r>
           </a:p>
         </p:txBody>
@@ -20843,7 +20192,7 @@
                 <a:ea typeface="Arial"/>
                 <a:cs typeface="Arial"/>
               </a:rPr>
-              <a:t>11:30–13:00    Akshaya</a:t>
+              <a:t>Akshaya</a:t>
             </a:r>
           </a:p>
         </p:txBody>
@@ -21651,7 +21000,7 @@
                 <a:ea typeface="Arial"/>
                 <a:cs typeface="Arial"/>
               </a:rPr>
-              <a:t>Repository-recorded screenshot; provenance in notes.  Synthetic research only. No clinical validation claimed.</a:t>
+              <a:t>Recorded screenshot: synthetic subject P0001 (training split); provenance in notes.  Synthetic research only. No clinical validation claimed.</a:t>
             </a:r>
           </a:p>
         </p:txBody>
@@ -21992,7 +21341,7 @@
                 <a:ea typeface="Arial"/>
                 <a:cs typeface="Arial"/>
               </a:rPr>
-              <a:t>13:00–14:30    Nikhil</a:t>
+              <a:t>Nikhil</a:t>
             </a:r>
           </a:p>
         </p:txBody>
@@ -22956,7 +22305,7 @@
                 <a:ea typeface="Arial"/>
                 <a:cs typeface="Arial"/>
               </a:rPr>
-              <a:t>Repository-recorded screenshot; provenance in notes.  Synthetic research only. No clinical validation claimed.</a:t>
+              <a:t>Recorded screenshot: synthetic subject P0001 (training split); provenance in notes.  Synthetic research only. No clinical validation claimed.</a:t>
             </a:r>
           </a:p>
         </p:txBody>

--- a/docs/presentation/presentation.pptx
+++ b/docs/presentation/presentation.pptx
@@ -1221,7 +1221,7 @@
           <a:p xmlns:a="http://schemas.openxmlformats.org/drawingml/2006/main"/>
           <a:p xmlns:a="http://schemas.openxmlformats.org/drawingml/2006/main">
             <a:r>
-              <a:t>SCREEN: Slide 3. Explain the cohort counts without opening any held-out files. The demonstration uses training-split subjects only; never select a test-split subject.</a:t>
+              <a:t>SCREEN: Slide 3. Explain the cohort counts without opening any held-out files. The deck screenshots use training-split subjects; do not assert which subject the published video shows.</a:t>
             </a:r>
           </a:p>
           <a:p xmlns:a="http://schemas.openxmlformats.org/drawingml/2006/main"/>
@@ -1233,7 +1233,7 @@
           <a:p xmlns:a="http://schemas.openxmlformats.org/drawingml/2006/main"/>
           <a:p xmlns:a="http://schemas.openxmlformats.org/drawingml/2006/main">
             <a:r>
-              <a:t>For this demonstration we use synthetic subjects from the training partition only. The screenshots in this deck show P0001 and P0095, both training-split subjects in the run's split file. That keeps the demonstration separate from held-out evaluation. We are replaying existing data, not collecting new data or generating a new cohort.</a:t>
+              <a:t>The screenshots in this deck show P0001 and P0095, both training-split subjects in the run's split file. The served application never lists or serves the sealed test split, so held-out evaluation stays separate from any demonstration. We are replaying existing data, not collecting new data or generating a new cohort.</a:t>
             </a:r>
           </a:p>
           <a:p xmlns:a="http://schemas.openxmlformats.org/drawingml/2006/main"/>
@@ -1657,13 +1657,13 @@
           <a:p xmlns:a="http://schemas.openxmlformats.org/drawingml/2006/main"/>
           <a:p xmlns:a="http://schemas.openxmlformats.org/drawingml/2006/main">
             <a:r>
-              <a:t>SCREEN: Switch from slide 7 to the application (http://127.0.0.1:3000/cohort). Select a training-split subject, confirm the Train label, and open its workspace. Read only the values that actually arrive: replay timestamp, current glucose, model mode and data status. Show at least two successive updates, then the interval and risk panels. Do not open test-split subjects. If no valid forecast arrives, say so rather than substituting fixtures.</a:t>
+              <a:t>SCREEN: Switch from slide 7 to the application (http://127.0.0.1:3000/cohort). Select a synthetic subject, read its split label aloud, and open its workspace. Sealed test-split subjects are not served. Read only the values that actually arrive: replay timestamp, current glucose, model mode and data status. Show at least two successive updates, then the interval and risk panels. Do not open test-split subjects. If no valid forecast arrives, say so rather than substituting fixtures.</a:t>
             </a:r>
           </a:p>
           <a:p xmlns:a="http://schemas.openxmlformats.org/drawingml/2006/main"/>
           <a:p xmlns:a="http://schemas.openxmlformats.org/drawingml/2006/main">
             <a:r>
-              <a:t>NIKHIL: We are now in the application. This is the synthetic cohort directory. I am selecting a synthetic subject from the training split. Before reading a forecast, I am checking the identity and the synthetic-data label.</a:t>
+              <a:t>NIKHIL: We are now in the application. This is the synthetic cohort directory. I am selecting a synthetic subject and reading its split label. Before reading a forecast, I am checking the identity and the synthetic-data label.</a:t>
             </a:r>
           </a:p>
           <a:p xmlns:a="http://schemas.openxmlformats.org/drawingml/2006/main"/>
@@ -14403,7 +14403,7 @@
                 <a:ea typeface="Arial"/>
                 <a:cs typeface="Arial"/>
               </a:rPr>
-              <a:t>Demonstration: training-split subjects only</a:t>
+              <a:t>Deck screenshots: synthetic training-split subjects. The published video's subject is not independently verified</a:t>
             </a:r>
           </a:p>
         </p:txBody>
@@ -19695,7 +19695,7 @@
                 <a:ea typeface="Arial"/>
                 <a:cs typeface="Arial"/>
               </a:rPr>
-              <a:t>Training-split subjects only; never the sealed test split</a:t>
+              <a:t>The replay API never serves sealed test-split subjects</a:t>
             </a:r>
           </a:p>
         </p:txBody>

--- a/docs/presentation/presentation.pptx
+++ b/docs/presentation/presentation.pptx
@@ -1021,7 +1021,7 @@
           <a:p xmlns:a="http://schemas.openxmlformats.org/drawingml/2006/main"/>
           <a:p xmlns:a="http://schemas.openxmlformats.org/drawingml/2006/main">
             <a:r>
-              <a:t>The evidence has clear limits. On the locked real-patient test, the model warned of only 6.9 percent of spikes at least thirty minutes ahead. That is the full-test point estimate, with a 95 percent interval from 0.0 to 13.9; the bootstrap mean is 6.0 percent. Two preregistered external checks, Hall 2018 and AZT1D, did not confirm the prespecified early-warning improvement. Candidate C2 is exploratory: plus 4.5 points, with an interval from minus 2.5 to plus 12.8 that includes zero. We have not established a treatment benefit.</a:t>
+              <a:t>The evidence has clear limits. On the locked real-patient test, the model warned of only 6.0 percent of spikes at least thirty minutes ahead (95 percent interval from 0.0 to 13.9; bootstrap mean in RESULTS.md; full-test point estimate is 6.9 percent). Two preregistered external checks, Hall 2018 and AZT1D, did not confirm the prespecified early-warning improvement. Candidate C2 is exploratory: plus 4.5 points, with an interval from minus 2.5 to plus 12.8 that includes zero. We have not established a treatment benefit.</a:t>
             </a:r>
           </a:p>
           <a:p xmlns:a="http://schemas.openxmlformats.org/drawingml/2006/main"/>
@@ -11923,7 +11923,7 @@
                 </a:solidFill>
                 <a:latin typeface="Arial"/>
               </a:rPr>
-              <a:t>only 6.9% of spikes warned ≥30 min ahead (95% CI 0.0–13.9; full-test point estimate, bootstrap mean 6.0%)</a:t>
+              <a:t>only 6.0% of spikes warned ≥30 min ahead (95% CI 0.0–13.9; bootstrap mean in RESULTS.md; full-test point estimate 6.9%)</a:t>
             </a:r>
           </a:p>
           <a:p xmlns:a="http://schemas.openxmlformats.org/drawingml/2006/main">
